--- a/skills/presentation-template-library/skills/artifact-template-moss-transformation/assets/reference.pptx
+++ b/skills/presentation-template-library/skills/artifact-template-moss-transformation/assets/reference.pptx
@@ -3814,7 +3814,7 @@
         </p:xfrm>
         <a:graphic xmlns:a="http://schemas.openxmlformats.org/drawingml/2006/main">
           <a:graphicData uri="http://schemas.openxmlformats.org/drawingml/2006/chart">
-            <c:chart xmlns:r="http://schemas.openxmlformats.org/officeDocument/2006/relationships" xmlns:c="http://schemas.openxmlformats.org/drawingml/2006/chart" r:id="Raa87b760504740d3"/>
+            <c:chart xmlns:r="http://schemas.openxmlformats.org/officeDocument/2006/relationships" xmlns:c="http://schemas.openxmlformats.org/drawingml/2006/chart" r:id="R19d4d772e7f848dd"/>
           </a:graphicData>
         </a:graphic>
       </p:graphicFrame>
@@ -3832,7 +3832,7 @@
         </p:xfrm>
         <a:graphic xmlns:a="http://schemas.openxmlformats.org/drawingml/2006/main">
           <a:graphicData uri="http://schemas.openxmlformats.org/drawingml/2006/chart">
-            <c:chart xmlns:r="http://schemas.openxmlformats.org/officeDocument/2006/relationships" xmlns:c="http://schemas.openxmlformats.org/drawingml/2006/chart" r:id="R375bccd274a94236"/>
+            <c:chart xmlns:r="http://schemas.openxmlformats.org/officeDocument/2006/relationships" xmlns:c="http://schemas.openxmlformats.org/drawingml/2006/chart" r:id="R4ef8474ad11b4f3d"/>
           </a:graphicData>
         </a:graphic>
       </p:graphicFrame>
@@ -6092,7 +6092,7 @@
         </p:xfrm>
         <a:graphic xmlns:a="http://schemas.openxmlformats.org/drawingml/2006/main">
           <a:graphicData uri="http://schemas.openxmlformats.org/drawingml/2006/chart">
-            <c:chart xmlns:r="http://schemas.openxmlformats.org/officeDocument/2006/relationships" xmlns:c="http://schemas.openxmlformats.org/drawingml/2006/chart" r:id="R9f040922b5434263"/>
+            <c:chart xmlns:r="http://schemas.openxmlformats.org/officeDocument/2006/relationships" xmlns:c="http://schemas.openxmlformats.org/drawingml/2006/chart" r:id="Rfbeb4767a05d4104"/>
           </a:graphicData>
         </a:graphic>
       </p:graphicFrame>
@@ -6110,7 +6110,7 @@
         </p:xfrm>
         <a:graphic xmlns:a="http://schemas.openxmlformats.org/drawingml/2006/main">
           <a:graphicData uri="http://schemas.openxmlformats.org/drawingml/2006/chart">
-            <c:chart xmlns:r="http://schemas.openxmlformats.org/officeDocument/2006/relationships" xmlns:c="http://schemas.openxmlformats.org/drawingml/2006/chart" r:id="R1eb2403b530247bc"/>
+            <c:chart xmlns:r="http://schemas.openxmlformats.org/officeDocument/2006/relationships" xmlns:c="http://schemas.openxmlformats.org/drawingml/2006/chart" r:id="Rfca3278297bb446f"/>
           </a:graphicData>
         </a:graphic>
       </p:graphicFrame>

--- a/skills/presentation-template-library/skills/artifact-template-moss-transformation/assets/reference.pptx
+++ b/skills/presentation-template-library/skills/artifact-template-moss-transformation/assets/reference.pptx
@@ -3814,7 +3814,7 @@
         </p:xfrm>
         <a:graphic xmlns:a="http://schemas.openxmlformats.org/drawingml/2006/main">
           <a:graphicData uri="http://schemas.openxmlformats.org/drawingml/2006/chart">
-            <c:chart xmlns:r="http://schemas.openxmlformats.org/officeDocument/2006/relationships" xmlns:c="http://schemas.openxmlformats.org/drawingml/2006/chart" r:id="R19d4d772e7f848dd"/>
+            <c:chart xmlns:r="http://schemas.openxmlformats.org/officeDocument/2006/relationships" xmlns:c="http://schemas.openxmlformats.org/drawingml/2006/chart" r:id="R14469bbb98564be2"/>
           </a:graphicData>
         </a:graphic>
       </p:graphicFrame>
@@ -3832,7 +3832,7 @@
         </p:xfrm>
         <a:graphic xmlns:a="http://schemas.openxmlformats.org/drawingml/2006/main">
           <a:graphicData uri="http://schemas.openxmlformats.org/drawingml/2006/chart">
-            <c:chart xmlns:r="http://schemas.openxmlformats.org/officeDocument/2006/relationships" xmlns:c="http://schemas.openxmlformats.org/drawingml/2006/chart" r:id="R4ef8474ad11b4f3d"/>
+            <c:chart xmlns:r="http://schemas.openxmlformats.org/officeDocument/2006/relationships" xmlns:c="http://schemas.openxmlformats.org/drawingml/2006/chart" r:id="Rd6ba51275ad843c2"/>
           </a:graphicData>
         </a:graphic>
       </p:graphicFrame>
@@ -6092,7 +6092,7 @@
         </p:xfrm>
         <a:graphic xmlns:a="http://schemas.openxmlformats.org/drawingml/2006/main">
           <a:graphicData uri="http://schemas.openxmlformats.org/drawingml/2006/chart">
-            <c:chart xmlns:r="http://schemas.openxmlformats.org/officeDocument/2006/relationships" xmlns:c="http://schemas.openxmlformats.org/drawingml/2006/chart" r:id="Rfbeb4767a05d4104"/>
+            <c:chart xmlns:r="http://schemas.openxmlformats.org/officeDocument/2006/relationships" xmlns:c="http://schemas.openxmlformats.org/drawingml/2006/chart" r:id="Rd2ac5d7460184093"/>
           </a:graphicData>
         </a:graphic>
       </p:graphicFrame>
@@ -6110,7 +6110,7 @@
         </p:xfrm>
         <a:graphic xmlns:a="http://schemas.openxmlformats.org/drawingml/2006/main">
           <a:graphicData uri="http://schemas.openxmlformats.org/drawingml/2006/chart">
-            <c:chart xmlns:r="http://schemas.openxmlformats.org/officeDocument/2006/relationships" xmlns:c="http://schemas.openxmlformats.org/drawingml/2006/chart" r:id="Rfca3278297bb446f"/>
+            <c:chart xmlns:r="http://schemas.openxmlformats.org/officeDocument/2006/relationships" xmlns:c="http://schemas.openxmlformats.org/drawingml/2006/chart" r:id="Ra25bda860fc04d00"/>
           </a:graphicData>
         </a:graphic>
       </p:graphicFrame>

--- a/skills/presentation-template-library/skills/artifact-template-moss-transformation/assets/reference.pptx
+++ b/skills/presentation-template-library/skills/artifact-template-moss-transformation/assets/reference.pptx
@@ -3814,7 +3814,7 @@
         </p:xfrm>
         <a:graphic xmlns:a="http://schemas.openxmlformats.org/drawingml/2006/main">
           <a:graphicData uri="http://schemas.openxmlformats.org/drawingml/2006/chart">
-            <c:chart xmlns:r="http://schemas.openxmlformats.org/officeDocument/2006/relationships" xmlns:c="http://schemas.openxmlformats.org/drawingml/2006/chart" r:id="R14469bbb98564be2"/>
+            <c:chart xmlns:r="http://schemas.openxmlformats.org/officeDocument/2006/relationships" xmlns:c="http://schemas.openxmlformats.org/drawingml/2006/chart" r:id="Re061de0e0a924b1e"/>
           </a:graphicData>
         </a:graphic>
       </p:graphicFrame>
@@ -3832,7 +3832,7 @@
         </p:xfrm>
         <a:graphic xmlns:a="http://schemas.openxmlformats.org/drawingml/2006/main">
           <a:graphicData uri="http://schemas.openxmlformats.org/drawingml/2006/chart">
-            <c:chart xmlns:r="http://schemas.openxmlformats.org/officeDocument/2006/relationships" xmlns:c="http://schemas.openxmlformats.org/drawingml/2006/chart" r:id="Rd6ba51275ad843c2"/>
+            <c:chart xmlns:r="http://schemas.openxmlformats.org/officeDocument/2006/relationships" xmlns:c="http://schemas.openxmlformats.org/drawingml/2006/chart" r:id="Red9e4a6709b447c4"/>
           </a:graphicData>
         </a:graphic>
       </p:graphicFrame>
@@ -6092,7 +6092,7 @@
         </p:xfrm>
         <a:graphic xmlns:a="http://schemas.openxmlformats.org/drawingml/2006/main">
           <a:graphicData uri="http://schemas.openxmlformats.org/drawingml/2006/chart">
-            <c:chart xmlns:r="http://schemas.openxmlformats.org/officeDocument/2006/relationships" xmlns:c="http://schemas.openxmlformats.org/drawingml/2006/chart" r:id="Rd2ac5d7460184093"/>
+            <c:chart xmlns:r="http://schemas.openxmlformats.org/officeDocument/2006/relationships" xmlns:c="http://schemas.openxmlformats.org/drawingml/2006/chart" r:id="Rcac82c6e64514e45"/>
           </a:graphicData>
         </a:graphic>
       </p:graphicFrame>
@@ -6110,7 +6110,7 @@
         </p:xfrm>
         <a:graphic xmlns:a="http://schemas.openxmlformats.org/drawingml/2006/main">
           <a:graphicData uri="http://schemas.openxmlformats.org/drawingml/2006/chart">
-            <c:chart xmlns:r="http://schemas.openxmlformats.org/officeDocument/2006/relationships" xmlns:c="http://schemas.openxmlformats.org/drawingml/2006/chart" r:id="Ra25bda860fc04d00"/>
+            <c:chart xmlns:r="http://schemas.openxmlformats.org/officeDocument/2006/relationships" xmlns:c="http://schemas.openxmlformats.org/drawingml/2006/chart" r:id="Rdba97b790c704057"/>
           </a:graphicData>
         </a:graphic>
       </p:graphicFrame>

--- a/skills/presentation-template-library/skills/artifact-template-moss-transformation/assets/reference.pptx
+++ b/skills/presentation-template-library/skills/artifact-template-moss-transformation/assets/reference.pptx
@@ -194,511 +194,6 @@
 </a:theme>
 </file>
 
-<file path=ppt/slides/charts/chart1.xml><?xml version="1.0" encoding="utf-8"?>
-<c:chartSpace xmlns:c="http://schemas.openxmlformats.org/drawingml/2006/chart" xmlns:a="http://schemas.openxmlformats.org/drawingml/2006/main">
-  <c:chart>
-    <c:title>
-      <c:tx>
-        <c:rich>
-          <a:bodyPr/>
-          <a:lstStyle/>
-          <a:p>
-            <a:r>
-              <a:t>Primary signal · observed versus reference</a:t>
-            </a:r>
-          </a:p>
-        </c:rich>
-      </c:tx>
-      <c:layout/>
-    </c:title>
-    <c:plotArea>
-      <c:layout/>
-      <c:barChart>
-        <c:barDir val="col"/>
-        <c:grouping val="clustered"/>
-        <c:ser>
-          <c:idx val="0"/>
-          <c:order val="0"/>
-          <c:tx>
-            <c:v>Observed</c:v>
-          </c:tx>
-          <c:spPr>
-            <a:solidFill>
-              <a:srgbClr val="58B88B"/>
-            </a:solidFill>
-          </c:spPr>
-          <c:cat>
-            <c:strLit>
-              <c:ptCount val="6"/>
-              <c:pt idx="0">
-                <c:v>Q1</c:v>
-              </c:pt>
-              <c:pt idx="1">
-                <c:v>Q2</c:v>
-              </c:pt>
-              <c:pt idx="2">
-                <c:v>Q3</c:v>
-              </c:pt>
-              <c:pt idx="3">
-                <c:v>Q4</c:v>
-              </c:pt>
-              <c:pt idx="4">
-                <c:v>Q5</c:v>
-              </c:pt>
-              <c:pt idx="5">
-                <c:v>Q6</c:v>
-              </c:pt>
-            </c:strLit>
-          </c:cat>
-          <c:val>
-            <c:numLit>
-              <c:formatCode>General</c:formatCode>
-              <c:ptCount val="6"/>
-              <c:pt idx="0">
-                <c:v>38</c:v>
-              </c:pt>
-              <c:pt idx="1">
-                <c:v>46</c:v>
-              </c:pt>
-              <c:pt idx="2">
-                <c:v>43</c:v>
-              </c:pt>
-              <c:pt idx="3">
-                <c:v>58</c:v>
-              </c:pt>
-              <c:pt idx="4">
-                <c:v>68</c:v>
-              </c:pt>
-              <c:pt idx="5">
-                <c:v>74</c:v>
-              </c:pt>
-            </c:numLit>
-          </c:val>
-        </c:ser>
-        <c:ser>
-          <c:idx val="1"/>
-          <c:order val="1"/>
-          <c:tx>
-            <c:v>Reference</c:v>
-          </c:tx>
-          <c:spPr>
-            <a:solidFill>
-              <a:srgbClr val="838884"/>
-            </a:solidFill>
-          </c:spPr>
-          <c:cat>
-            <c:strLit>
-              <c:ptCount val="6"/>
-              <c:pt idx="0">
-                <c:v>Q1</c:v>
-              </c:pt>
-              <c:pt idx="1">
-                <c:v>Q2</c:v>
-              </c:pt>
-              <c:pt idx="2">
-                <c:v>Q3</c:v>
-              </c:pt>
-              <c:pt idx="3">
-                <c:v>Q4</c:v>
-              </c:pt>
-              <c:pt idx="4">
-                <c:v>Q5</c:v>
-              </c:pt>
-              <c:pt idx="5">
-                <c:v>Q6</c:v>
-              </c:pt>
-            </c:strLit>
-          </c:cat>
-          <c:val>
-            <c:numLit>
-              <c:formatCode>General</c:formatCode>
-              <c:ptCount val="6"/>
-              <c:pt idx="0">
-                <c:v>34</c:v>
-              </c:pt>
-              <c:pt idx="1">
-                <c:v>39</c:v>
-              </c:pt>
-              <c:pt idx="2">
-                <c:v>41</c:v>
-              </c:pt>
-              <c:pt idx="3">
-                <c:v>45</c:v>
-              </c:pt>
-              <c:pt idx="4">
-                <c:v>49</c:v>
-              </c:pt>
-              <c:pt idx="5">
-                <c:v>52</c:v>
-              </c:pt>
-            </c:numLit>
-          </c:val>
-        </c:ser>
-        <c:axId val="1"/>
-        <c:axId val="2"/>
-      </c:barChart>
-      <c:catAx>
-        <c:axId val="1"/>
-        <c:scaling>
-          <c:orientation val="minMax"/>
-        </c:scaling>
-        <c:axPos val="b"/>
-        <c:crossAx val="2"/>
-      </c:catAx>
-      <c:valAx>
-        <c:axId val="2"/>
-        <c:scaling>
-          <c:orientation val="minMax"/>
-        </c:scaling>
-        <c:axPos val="l"/>
-        <c:crossAx val="1"/>
-      </c:valAx>
-    </c:plotArea>
-    <c:legend>
-      <c:legendPos val="r"/>
-      <c:layout/>
-    </c:legend>
-    <c:plotVisOnly val="1"/>
-  </c:chart>
-</c:chartSpace>
-</file>
-
-<file path=ppt/slides/charts/chart2.xml><?xml version="1.0" encoding="utf-8"?>
-<c:chartSpace xmlns:c="http://schemas.openxmlformats.org/drawingml/2006/chart" xmlns:a="http://schemas.openxmlformats.org/drawingml/2006/main">
-  <c:chart>
-    <c:title>
-      <c:tx>
-        <c:rich>
-          <a:bodyPr/>
-          <a:lstStyle/>
-          <a:p>
-            <a:r>
-              <a:t>Driver trend</a:t>
-            </a:r>
-          </a:p>
-        </c:rich>
-      </c:tx>
-      <c:layout/>
-    </c:title>
-    <c:plotArea>
-      <c:layout/>
-      <c:lineChart>
-        <c:grouping val="standard"/>
-        <c:ser>
-          <c:idx val="0"/>
-          <c:order val="0"/>
-          <c:tx>
-            <c:v>Driver</c:v>
-          </c:tx>
-          <c:spPr>
-            <a:solidFill>
-              <a:srgbClr val="A5E26D"/>
-            </a:solidFill>
-            <a:ln w="38100">
-              <a:solidFill>
-                <a:srgbClr val="A5E26D"/>
-              </a:solidFill>
-              <a:prstDash val="solid"/>
-            </a:ln>
-          </c:spPr>
-          <c:marker>
-            <c:symbol val="circle"/>
-            <c:size val="6"/>
-          </c:marker>
-          <c:cat>
-            <c:strLit>
-              <c:ptCount val="6"/>
-              <c:pt idx="0">
-                <c:v>Q1</c:v>
-              </c:pt>
-              <c:pt idx="1">
-                <c:v>Q2</c:v>
-              </c:pt>
-              <c:pt idx="2">
-                <c:v>Q3</c:v>
-              </c:pt>
-              <c:pt idx="3">
-                <c:v>Q4</c:v>
-              </c:pt>
-              <c:pt idx="4">
-                <c:v>Q5</c:v>
-              </c:pt>
-              <c:pt idx="5">
-                <c:v>Q6</c:v>
-              </c:pt>
-            </c:strLit>
-          </c:cat>
-          <c:val>
-            <c:numLit>
-              <c:formatCode>General</c:formatCode>
-              <c:ptCount val="6"/>
-              <c:pt idx="0">
-                <c:v>22</c:v>
-              </c:pt>
-              <c:pt idx="1">
-                <c:v>28</c:v>
-              </c:pt>
-              <c:pt idx="2">
-                <c:v>34</c:v>
-              </c:pt>
-              <c:pt idx="3">
-                <c:v>39</c:v>
-              </c:pt>
-              <c:pt idx="4">
-                <c:v>45</c:v>
-              </c:pt>
-              <c:pt idx="5">
-                <c:v>51</c:v>
-              </c:pt>
-            </c:numLit>
-          </c:val>
-        </c:ser>
-        <c:axId val="1"/>
-        <c:axId val="2"/>
-      </c:lineChart>
-      <c:catAx>
-        <c:axId val="1"/>
-        <c:scaling>
-          <c:orientation val="minMax"/>
-        </c:scaling>
-        <c:axPos val="b"/>
-        <c:crossAx val="2"/>
-      </c:catAx>
-      <c:valAx>
-        <c:axId val="2"/>
-        <c:scaling>
-          <c:orientation val="minMax"/>
-        </c:scaling>
-        <c:axPos val="l"/>
-        <c:crossAx val="1"/>
-      </c:valAx>
-    </c:plotArea>
-    <c:plotVisOnly val="1"/>
-  </c:chart>
-</c:chartSpace>
-</file>
-
-<file path=ppt/slides/charts/chart3.xml><?xml version="1.0" encoding="utf-8"?>
-<c:chartSpace xmlns:c="http://schemas.openxmlformats.org/drawingml/2006/chart" xmlns:a="http://schemas.openxmlformats.org/drawingml/2006/main">
-  <c:chart>
-    <c:title>
-      <c:tx>
-        <c:rich>
-          <a:bodyPr/>
-          <a:lstStyle/>
-          <a:p>
-            <a:r>
-              <a:t>Observed signal</a:t>
-            </a:r>
-          </a:p>
-        </c:rich>
-      </c:tx>
-      <c:layout/>
-    </c:title>
-    <c:plotArea>
-      <c:layout/>
-      <c:barChart>
-        <c:barDir val="col"/>
-        <c:grouping val="clustered"/>
-        <c:ser>
-          <c:idx val="0"/>
-          <c:order val="0"/>
-          <c:tx>
-            <c:v>Observed</c:v>
-          </c:tx>
-          <c:spPr>
-            <a:solidFill>
-              <a:srgbClr val="58B88B"/>
-            </a:solidFill>
-          </c:spPr>
-          <c:cat>
-            <c:strLit>
-              <c:ptCount val="6"/>
-              <c:pt idx="0">
-                <c:v>A</c:v>
-              </c:pt>
-              <c:pt idx="1">
-                <c:v>B</c:v>
-              </c:pt>
-              <c:pt idx="2">
-                <c:v>C</c:v>
-              </c:pt>
-              <c:pt idx="3">
-                <c:v>D</c:v>
-              </c:pt>
-              <c:pt idx="4">
-                <c:v>E</c:v>
-              </c:pt>
-              <c:pt idx="5">
-                <c:v>F</c:v>
-              </c:pt>
-            </c:strLit>
-          </c:cat>
-          <c:val>
-            <c:numLit>
-              <c:formatCode>General</c:formatCode>
-              <c:ptCount val="6"/>
-              <c:pt idx="0">
-                <c:v>38</c:v>
-              </c:pt>
-              <c:pt idx="1">
-                <c:v>46</c:v>
-              </c:pt>
-              <c:pt idx="2">
-                <c:v>43</c:v>
-              </c:pt>
-              <c:pt idx="3">
-                <c:v>58</c:v>
-              </c:pt>
-              <c:pt idx="4">
-                <c:v>68</c:v>
-              </c:pt>
-              <c:pt idx="5">
-                <c:v>74</c:v>
-              </c:pt>
-            </c:numLit>
-          </c:val>
-        </c:ser>
-        <c:axId val="1"/>
-        <c:axId val="2"/>
-      </c:barChart>
-      <c:catAx>
-        <c:axId val="1"/>
-        <c:scaling>
-          <c:orientation val="minMax"/>
-        </c:scaling>
-        <c:axPos val="b"/>
-        <c:crossAx val="2"/>
-      </c:catAx>
-      <c:valAx>
-        <c:axId val="2"/>
-        <c:scaling>
-          <c:orientation val="minMax"/>
-        </c:scaling>
-        <c:axPos val="l"/>
-        <c:crossAx val="1"/>
-      </c:valAx>
-    </c:plotArea>
-    <c:plotVisOnly val="1"/>
-  </c:chart>
-</c:chartSpace>
-</file>
-
-<file path=ppt/slides/charts/chart4.xml><?xml version="1.0" encoding="utf-8"?>
-<c:chartSpace xmlns:c="http://schemas.openxmlformats.org/drawingml/2006/chart" xmlns:a="http://schemas.openxmlformats.org/drawingml/2006/main">
-  <c:chart>
-    <c:title>
-      <c:tx>
-        <c:rich>
-          <a:bodyPr/>
-          <a:lstStyle/>
-          <a:p>
-            <a:r>
-              <a:t>Context</a:t>
-            </a:r>
-          </a:p>
-        </c:rich>
-      </c:tx>
-      <c:layout/>
-    </c:title>
-    <c:plotArea>
-      <c:layout/>
-      <c:lineChart>
-        <c:grouping val="standard"/>
-        <c:ser>
-          <c:idx val="0"/>
-          <c:order val="0"/>
-          <c:tx>
-            <c:v>Context</c:v>
-          </c:tx>
-          <c:spPr>
-            <a:solidFill>
-              <a:srgbClr val="A5E26D"/>
-            </a:solidFill>
-            <a:ln w="38100">
-              <a:solidFill>
-                <a:srgbClr val="A5E26D"/>
-              </a:solidFill>
-              <a:prstDash val="solid"/>
-            </a:ln>
-          </c:spPr>
-          <c:marker>
-            <c:symbol val="circle"/>
-            <c:size val="6"/>
-          </c:marker>
-          <c:cat>
-            <c:strLit>
-              <c:ptCount val="6"/>
-              <c:pt idx="0">
-                <c:v>A</c:v>
-              </c:pt>
-              <c:pt idx="1">
-                <c:v>B</c:v>
-              </c:pt>
-              <c:pt idx="2">
-                <c:v>C</c:v>
-              </c:pt>
-              <c:pt idx="3">
-                <c:v>D</c:v>
-              </c:pt>
-              <c:pt idx="4">
-                <c:v>E</c:v>
-              </c:pt>
-              <c:pt idx="5">
-                <c:v>F</c:v>
-              </c:pt>
-            </c:strLit>
-          </c:cat>
-          <c:val>
-            <c:numLit>
-              <c:formatCode>General</c:formatCode>
-              <c:ptCount val="6"/>
-              <c:pt idx="0">
-                <c:v>34</c:v>
-              </c:pt>
-              <c:pt idx="1">
-                <c:v>39</c:v>
-              </c:pt>
-              <c:pt idx="2">
-                <c:v>41</c:v>
-              </c:pt>
-              <c:pt idx="3">
-                <c:v>45</c:v>
-              </c:pt>
-              <c:pt idx="4">
-                <c:v>49</c:v>
-              </c:pt>
-              <c:pt idx="5">
-                <c:v>52</c:v>
-              </c:pt>
-            </c:numLit>
-          </c:val>
-        </c:ser>
-        <c:axId val="1"/>
-        <c:axId val="2"/>
-      </c:lineChart>
-      <c:catAx>
-        <c:axId val="1"/>
-        <c:scaling>
-          <c:orientation val="minMax"/>
-        </c:scaling>
-        <c:axPos val="b"/>
-        <c:crossAx val="2"/>
-      </c:catAx>
-      <c:valAx>
-        <c:axId val="2"/>
-        <c:scaling>
-          <c:orientation val="minMax"/>
-        </c:scaling>
-        <c:axPos val="l"/>
-        <c:crossAx val="1"/>
-      </c:valAx>
-    </c:plotArea>
-    <c:plotVisOnly val="1"/>
-  </c:chart>
-</c:chartSpace>
-</file>
-
 <file path=ppt/slides/slide1.xml><?xml version="1.0" encoding="utf-8"?>
 <p:sld xmlns:p="http://schemas.openxmlformats.org/presentationml/2006/main">
   <p:cSld name="Opening claim">
@@ -3800,52 +3295,53 @@
           </a:p>
         </p:txBody>
       </p:sp>
-      <p:graphicFrame>
-        <p:nvGraphicFramePr>
-          <p:cNvPr id="19" name="dense-primary-chart"/>
-          <p:cNvGraphicFramePr>
-            <a:graphicFrameLocks xmlns:a="http://schemas.openxmlformats.org/drawingml/2006/main" noGrp="1"/>
-          </p:cNvGraphicFramePr>
-          <p:nvPr/>
-        </p:nvGraphicFramePr>
-        <p:xfrm>
-          <a:off xmlns:a="http://schemas.openxmlformats.org/drawingml/2006/main" x="990600" y="3048000"/>
-          <a:ext xmlns:a="http://schemas.openxmlformats.org/drawingml/2006/main" cx="6286500" cy="2952750"/>
-        </p:xfrm>
-        <a:graphic xmlns:a="http://schemas.openxmlformats.org/drawingml/2006/main">
-          <a:graphicData uri="http://schemas.openxmlformats.org/drawingml/2006/chart">
-            <c:chart xmlns:r="http://schemas.openxmlformats.org/officeDocument/2006/relationships" xmlns:c="http://schemas.openxmlformats.org/drawingml/2006/chart" r:id="Re061de0e0a924b1e"/>
-          </a:graphicData>
-        </a:graphic>
-      </p:graphicFrame>
-      <p:graphicFrame>
-        <p:nvGraphicFramePr>
-          <p:cNvPr id="20" name="dense-secondary-chart"/>
-          <p:cNvGraphicFramePr>
-            <a:graphicFrameLocks xmlns:a="http://schemas.openxmlformats.org/drawingml/2006/main" noGrp="1"/>
-          </p:cNvGraphicFramePr>
-          <p:nvPr/>
-        </p:nvGraphicFramePr>
-        <p:xfrm>
-          <a:off xmlns:a="http://schemas.openxmlformats.org/drawingml/2006/main" x="7658100" y="3048000"/>
-          <a:ext xmlns:a="http://schemas.openxmlformats.org/drawingml/2006/main" cx="3143250" cy="2952750"/>
-        </p:xfrm>
-        <a:graphic xmlns:a="http://schemas.openxmlformats.org/drawingml/2006/main">
-          <a:graphicData uri="http://schemas.openxmlformats.org/drawingml/2006/chart">
-            <c:chart xmlns:r="http://schemas.openxmlformats.org/officeDocument/2006/relationships" xmlns:c="http://schemas.openxmlformats.org/drawingml/2006/chart" r:id="Red9e4a6709b447c4"/>
-          </a:graphicData>
-        </a:graphic>
-      </p:graphicFrame>
-      <p:sp>
-        <p:nvSpPr>
-          <p:cNvPr id="21" name="dense-read-rule"/>
-          <p:cNvSpPr/>
-          <p:nvPr/>
-        </p:nvSpPr>
-        <p:spPr>
-          <a:xfrm xmlns:a="http://schemas.openxmlformats.org/drawingml/2006/main">
-            <a:off x="11315700" y="3314700"/>
-            <a:ext cx="2686050" cy="0"/>
+      <p:sp>
+        <p:nvSpPr>
+          <p:cNvPr id="19" name="timeline-label"/>
+          <p:cNvSpPr txBox="1"/>
+          <p:nvPr/>
+        </p:nvSpPr>
+        <p:spPr>
+          <a:xfrm xmlns:a="http://schemas.openxmlformats.org/drawingml/2006/main">
+            <a:off x="1066800" y="3238500"/>
+            <a:ext cx="4000500" cy="228600"/>
+          </a:xfrm>
+          <a:prstGeom xmlns:a="http://schemas.openxmlformats.org/drawingml/2006/main" prst="rect">
+            <a:avLst/>
+          </a:prstGeom>
+          <a:noFill xmlns:a="http://schemas.openxmlformats.org/drawingml/2006/main"/>
+          <a:ln xmlns:a="http://schemas.openxmlformats.org/drawingml/2006/main" w="0">
+            <a:noFill/>
+          </a:ln>
+        </p:spPr>
+        <p:txBody>
+          <a:bodyPr xmlns:a="http://schemas.openxmlformats.org/drawingml/2006/main" wrap="square" lIns="0" tIns="0" rIns="0" bIns="0" anchor="t"/>
+          <a:lstStyle xmlns:a="http://schemas.openxmlformats.org/drawingml/2006/main"/>
+          <a:p xmlns:a="http://schemas.openxmlformats.org/drawingml/2006/main">
+            <a:r>
+              <a:rPr lang="en-US" sz="1125" b="1">
+                <a:solidFill>
+                  <a:srgbClr val="58B88B"/>
+                </a:solidFill>
+                <a:latin typeface="Arial"/>
+                <a:ea typeface="Arial"/>
+              </a:rPr>
+              <a:t>EVOLUTION / TRANSITION</a:t>
+            </a:r>
+            <a:endParaRPr lang="en-US"/>
+          </a:p>
+        </p:txBody>
+      </p:sp>
+      <p:sp>
+        <p:nvSpPr>
+          <p:cNvPr id="20" name="timeline-axis"/>
+          <p:cNvSpPr/>
+          <p:nvPr/>
+        </p:nvSpPr>
+        <p:spPr>
+          <a:xfrm xmlns:a="http://schemas.openxmlformats.org/drawingml/2006/main">
+            <a:off x="1219200" y="4762500"/>
+            <a:ext cx="10287000" cy="0"/>
           </a:xfrm>
           <a:prstGeom xmlns:a="http://schemas.openxmlformats.org/drawingml/2006/main" prst="line">
             <a:avLst/>
@@ -3853,6 +3349,642 @@
           <a:noFill xmlns:a="http://schemas.openxmlformats.org/drawingml/2006/main"/>
           <a:ln xmlns:a="http://schemas.openxmlformats.org/drawingml/2006/main" w="38100">
             <a:solidFill>
+              <a:srgbClr val="838884"/>
+            </a:solidFill>
+            <a:prstDash val="solid"/>
+          </a:ln>
+        </p:spPr>
+        <p:txBody>
+          <a:bodyPr xmlns:a="http://schemas.openxmlformats.org/drawingml/2006/main" wrap="square" lIns="0" tIns="0" rIns="0" bIns="0" anchor="t"/>
+          <a:lstStyle xmlns:a="http://schemas.openxmlformats.org/drawingml/2006/main"/>
+          <a:p xmlns:a="http://schemas.openxmlformats.org/drawingml/2006/main">
+            <a:r>
+              <a:rPr lang="en-US"/>
+              <a:t/>
+            </a:r>
+            <a:endParaRPr lang="en-US"/>
+          </a:p>
+        </p:txBody>
+      </p:sp>
+      <p:sp>
+        <p:nvSpPr>
+          <p:cNvPr id="21" name="timeline-node-0"/>
+          <p:cNvSpPr/>
+          <p:nvPr/>
+        </p:nvSpPr>
+        <p:spPr>
+          <a:xfrm xmlns:a="http://schemas.openxmlformats.org/drawingml/2006/main">
+            <a:off x="1066800" y="4610100"/>
+            <a:ext cx="304800" cy="304800"/>
+          </a:xfrm>
+          <a:prstGeom xmlns:a="http://schemas.openxmlformats.org/drawingml/2006/main" prst="ellipse">
+            <a:avLst/>
+          </a:prstGeom>
+          <a:solidFill xmlns:a="http://schemas.openxmlformats.org/drawingml/2006/main">
+            <a:srgbClr val="202522"/>
+          </a:solidFill>
+          <a:ln xmlns:a="http://schemas.openxmlformats.org/drawingml/2006/main" w="25400">
+            <a:solidFill>
+              <a:srgbClr val="EEF4EE"/>
+            </a:solidFill>
+            <a:prstDash val="solid"/>
+          </a:ln>
+        </p:spPr>
+        <p:txBody>
+          <a:bodyPr xmlns:a="http://schemas.openxmlformats.org/drawingml/2006/main" wrap="square" lIns="0" tIns="0" rIns="0" bIns="0" anchor="t"/>
+          <a:lstStyle xmlns:a="http://schemas.openxmlformats.org/drawingml/2006/main"/>
+          <a:p xmlns:a="http://schemas.openxmlformats.org/drawingml/2006/main">
+            <a:r>
+              <a:rPr lang="en-US"/>
+              <a:t/>
+            </a:r>
+            <a:endParaRPr lang="en-US"/>
+          </a:p>
+        </p:txBody>
+      </p:sp>
+      <p:sp>
+        <p:nvSpPr>
+          <p:cNvPr id="22" name="timeline-number-0"/>
+          <p:cNvSpPr txBox="1"/>
+          <p:nvPr/>
+        </p:nvSpPr>
+        <p:spPr>
+          <a:xfrm xmlns:a="http://schemas.openxmlformats.org/drawingml/2006/main">
+            <a:off x="952500" y="4076700"/>
+            <a:ext cx="533400" cy="190500"/>
+          </a:xfrm>
+          <a:prstGeom xmlns:a="http://schemas.openxmlformats.org/drawingml/2006/main" prst="rect">
+            <a:avLst/>
+          </a:prstGeom>
+          <a:noFill xmlns:a="http://schemas.openxmlformats.org/drawingml/2006/main"/>
+          <a:ln xmlns:a="http://schemas.openxmlformats.org/drawingml/2006/main" w="0">
+            <a:noFill/>
+          </a:ln>
+        </p:spPr>
+        <p:txBody>
+          <a:bodyPr xmlns:a="http://schemas.openxmlformats.org/drawingml/2006/main" wrap="square" lIns="0" tIns="0" rIns="0" bIns="0" anchor="t"/>
+          <a:lstStyle xmlns:a="http://schemas.openxmlformats.org/drawingml/2006/main"/>
+          <a:p xmlns:a="http://schemas.openxmlformats.org/drawingml/2006/main">
+            <a:pPr algn="ctr"/>
+            <a:r>
+              <a:rPr lang="en-US" sz="975" b="1">
+                <a:solidFill>
+                  <a:srgbClr val="58B88B"/>
+                </a:solidFill>
+                <a:latin typeface="Arial"/>
+                <a:ea typeface="Arial"/>
+              </a:rPr>
+              <a:t>01</a:t>
+            </a:r>
+            <a:endParaRPr lang="en-US"/>
+          </a:p>
+        </p:txBody>
+      </p:sp>
+      <p:sp>
+        <p:nvSpPr>
+          <p:cNvPr id="23" name="timeline-label-0"/>
+          <p:cNvSpPr txBox="1"/>
+          <p:nvPr/>
+        </p:nvSpPr>
+        <p:spPr>
+          <a:xfrm xmlns:a="http://schemas.openxmlformats.org/drawingml/2006/main">
+            <a:off x="533400" y="5086350"/>
+            <a:ext cx="1371600" cy="228600"/>
+          </a:xfrm>
+          <a:prstGeom xmlns:a="http://schemas.openxmlformats.org/drawingml/2006/main" prst="rect">
+            <a:avLst/>
+          </a:prstGeom>
+          <a:noFill xmlns:a="http://schemas.openxmlformats.org/drawingml/2006/main"/>
+          <a:ln xmlns:a="http://schemas.openxmlformats.org/drawingml/2006/main" w="0">
+            <a:noFill/>
+          </a:ln>
+        </p:spPr>
+        <p:txBody>
+          <a:bodyPr xmlns:a="http://schemas.openxmlformats.org/drawingml/2006/main" wrap="square" lIns="0" tIns="0" rIns="0" bIns="0" anchor="t"/>
+          <a:lstStyle xmlns:a="http://schemas.openxmlformats.org/drawingml/2006/main"/>
+          <a:p xmlns:a="http://schemas.openxmlformats.org/drawingml/2006/main">
+            <a:pPr algn="ctr"/>
+            <a:r>
+              <a:rPr lang="en-US" sz="1350" b="1">
+                <a:solidFill>
+                  <a:srgbClr val="EEF4EE"/>
+                </a:solidFill>
+                <a:latin typeface="Arial"/>
+                <a:ea typeface="Arial"/>
+              </a:rPr>
+              <a:t>Frame</a:t>
+            </a:r>
+            <a:endParaRPr lang="en-US"/>
+          </a:p>
+        </p:txBody>
+      </p:sp>
+      <p:sp>
+        <p:nvSpPr>
+          <p:cNvPr id="24" name="timeline-text-0"/>
+          <p:cNvSpPr txBox="1"/>
+          <p:nvPr/>
+        </p:nvSpPr>
+        <p:spPr>
+          <a:xfrm xmlns:a="http://schemas.openxmlformats.org/drawingml/2006/main">
+            <a:off x="323850" y="5391150"/>
+            <a:ext cx="1790700" cy="361950"/>
+          </a:xfrm>
+          <a:prstGeom xmlns:a="http://schemas.openxmlformats.org/drawingml/2006/main" prst="rect">
+            <a:avLst/>
+          </a:prstGeom>
+          <a:noFill xmlns:a="http://schemas.openxmlformats.org/drawingml/2006/main"/>
+          <a:ln xmlns:a="http://schemas.openxmlformats.org/drawingml/2006/main" w="0">
+            <a:noFill/>
+          </a:ln>
+        </p:spPr>
+        <p:txBody>
+          <a:bodyPr xmlns:a="http://schemas.openxmlformats.org/drawingml/2006/main" wrap="square" lIns="0" tIns="0" rIns="0" bIns="0" anchor="t"/>
+          <a:lstStyle xmlns:a="http://schemas.openxmlformats.org/drawingml/2006/main"/>
+          <a:p xmlns:a="http://schemas.openxmlformats.org/drawingml/2006/main">
+            <a:pPr algn="ctr"/>
+            <a:r>
+              <a:rPr lang="en-US" sz="1050">
+                <a:solidFill>
+                  <a:srgbClr val="838884"/>
+                </a:solidFill>
+                <a:latin typeface="Arial"/>
+                <a:ea typeface="Arial"/>
+              </a:rPr>
+              <a:t>Name the question</a:t>
+            </a:r>
+            <a:endParaRPr lang="en-US"/>
+          </a:p>
+        </p:txBody>
+      </p:sp>
+      <p:sp>
+        <p:nvSpPr>
+          <p:cNvPr id="25" name="timeline-node-1"/>
+          <p:cNvSpPr/>
+          <p:nvPr/>
+        </p:nvSpPr>
+        <p:spPr>
+          <a:xfrm xmlns:a="http://schemas.openxmlformats.org/drawingml/2006/main">
+            <a:off x="3638550" y="4610100"/>
+            <a:ext cx="304800" cy="304800"/>
+          </a:xfrm>
+          <a:prstGeom xmlns:a="http://schemas.openxmlformats.org/drawingml/2006/main" prst="ellipse">
+            <a:avLst/>
+          </a:prstGeom>
+          <a:solidFill xmlns:a="http://schemas.openxmlformats.org/drawingml/2006/main">
+            <a:srgbClr val="202522"/>
+          </a:solidFill>
+          <a:ln xmlns:a="http://schemas.openxmlformats.org/drawingml/2006/main" w="25400">
+            <a:solidFill>
+              <a:srgbClr val="EEF4EE"/>
+            </a:solidFill>
+            <a:prstDash val="solid"/>
+          </a:ln>
+        </p:spPr>
+        <p:txBody>
+          <a:bodyPr xmlns:a="http://schemas.openxmlformats.org/drawingml/2006/main" wrap="square" lIns="0" tIns="0" rIns="0" bIns="0" anchor="t"/>
+          <a:lstStyle xmlns:a="http://schemas.openxmlformats.org/drawingml/2006/main"/>
+          <a:p xmlns:a="http://schemas.openxmlformats.org/drawingml/2006/main">
+            <a:r>
+              <a:rPr lang="en-US"/>
+              <a:t/>
+            </a:r>
+            <a:endParaRPr lang="en-US"/>
+          </a:p>
+        </p:txBody>
+      </p:sp>
+      <p:sp>
+        <p:nvSpPr>
+          <p:cNvPr id="26" name="timeline-number-1"/>
+          <p:cNvSpPr txBox="1"/>
+          <p:nvPr/>
+        </p:nvSpPr>
+        <p:spPr>
+          <a:xfrm xmlns:a="http://schemas.openxmlformats.org/drawingml/2006/main">
+            <a:off x="3524250" y="4076700"/>
+            <a:ext cx="533400" cy="190500"/>
+          </a:xfrm>
+          <a:prstGeom xmlns:a="http://schemas.openxmlformats.org/drawingml/2006/main" prst="rect">
+            <a:avLst/>
+          </a:prstGeom>
+          <a:noFill xmlns:a="http://schemas.openxmlformats.org/drawingml/2006/main"/>
+          <a:ln xmlns:a="http://schemas.openxmlformats.org/drawingml/2006/main" w="0">
+            <a:noFill/>
+          </a:ln>
+        </p:spPr>
+        <p:txBody>
+          <a:bodyPr xmlns:a="http://schemas.openxmlformats.org/drawingml/2006/main" wrap="square" lIns="0" tIns="0" rIns="0" bIns="0" anchor="t"/>
+          <a:lstStyle xmlns:a="http://schemas.openxmlformats.org/drawingml/2006/main"/>
+          <a:p xmlns:a="http://schemas.openxmlformats.org/drawingml/2006/main">
+            <a:pPr algn="ctr"/>
+            <a:r>
+              <a:rPr lang="en-US" sz="975" b="1">
+                <a:solidFill>
+                  <a:srgbClr val="58B88B"/>
+                </a:solidFill>
+                <a:latin typeface="Arial"/>
+                <a:ea typeface="Arial"/>
+              </a:rPr>
+              <a:t>02</a:t>
+            </a:r>
+            <a:endParaRPr lang="en-US"/>
+          </a:p>
+        </p:txBody>
+      </p:sp>
+      <p:sp>
+        <p:nvSpPr>
+          <p:cNvPr id="27" name="timeline-label-1"/>
+          <p:cNvSpPr txBox="1"/>
+          <p:nvPr/>
+        </p:nvSpPr>
+        <p:spPr>
+          <a:xfrm xmlns:a="http://schemas.openxmlformats.org/drawingml/2006/main">
+            <a:off x="3105150" y="5086350"/>
+            <a:ext cx="1371600" cy="228600"/>
+          </a:xfrm>
+          <a:prstGeom xmlns:a="http://schemas.openxmlformats.org/drawingml/2006/main" prst="rect">
+            <a:avLst/>
+          </a:prstGeom>
+          <a:noFill xmlns:a="http://schemas.openxmlformats.org/drawingml/2006/main"/>
+          <a:ln xmlns:a="http://schemas.openxmlformats.org/drawingml/2006/main" w="0">
+            <a:noFill/>
+          </a:ln>
+        </p:spPr>
+        <p:txBody>
+          <a:bodyPr xmlns:a="http://schemas.openxmlformats.org/drawingml/2006/main" wrap="square" lIns="0" tIns="0" rIns="0" bIns="0" anchor="t"/>
+          <a:lstStyle xmlns:a="http://schemas.openxmlformats.org/drawingml/2006/main"/>
+          <a:p xmlns:a="http://schemas.openxmlformats.org/drawingml/2006/main">
+            <a:pPr algn="ctr"/>
+            <a:r>
+              <a:rPr lang="en-US" sz="1350" b="1">
+                <a:solidFill>
+                  <a:srgbClr val="EEF4EE"/>
+                </a:solidFill>
+                <a:latin typeface="Arial"/>
+                <a:ea typeface="Arial"/>
+              </a:rPr>
+              <a:t>Test</a:t>
+            </a:r>
+            <a:endParaRPr lang="en-US"/>
+          </a:p>
+        </p:txBody>
+      </p:sp>
+      <p:sp>
+        <p:nvSpPr>
+          <p:cNvPr id="28" name="timeline-text-1"/>
+          <p:cNvSpPr txBox="1"/>
+          <p:nvPr/>
+        </p:nvSpPr>
+        <p:spPr>
+          <a:xfrm xmlns:a="http://schemas.openxmlformats.org/drawingml/2006/main">
+            <a:off x="2895600" y="5391150"/>
+            <a:ext cx="1790700" cy="361950"/>
+          </a:xfrm>
+          <a:prstGeom xmlns:a="http://schemas.openxmlformats.org/drawingml/2006/main" prst="rect">
+            <a:avLst/>
+          </a:prstGeom>
+          <a:noFill xmlns:a="http://schemas.openxmlformats.org/drawingml/2006/main"/>
+          <a:ln xmlns:a="http://schemas.openxmlformats.org/drawingml/2006/main" w="0">
+            <a:noFill/>
+          </a:ln>
+        </p:spPr>
+        <p:txBody>
+          <a:bodyPr xmlns:a="http://schemas.openxmlformats.org/drawingml/2006/main" wrap="square" lIns="0" tIns="0" rIns="0" bIns="0" anchor="t"/>
+          <a:lstStyle xmlns:a="http://schemas.openxmlformats.org/drawingml/2006/main"/>
+          <a:p xmlns:a="http://schemas.openxmlformats.org/drawingml/2006/main">
+            <a:pPr algn="ctr"/>
+            <a:r>
+              <a:rPr lang="en-US" sz="1050">
+                <a:solidFill>
+                  <a:srgbClr val="838884"/>
+                </a:solidFill>
+                <a:latin typeface="Arial"/>
+                <a:ea typeface="Arial"/>
+              </a:rPr>
+              <a:t>Hold the rule</a:t>
+            </a:r>
+            <a:endParaRPr lang="en-US"/>
+          </a:p>
+        </p:txBody>
+      </p:sp>
+      <p:sp>
+        <p:nvSpPr>
+          <p:cNvPr id="29" name="timeline-node-2"/>
+          <p:cNvSpPr/>
+          <p:nvPr/>
+        </p:nvSpPr>
+        <p:spPr>
+          <a:xfrm xmlns:a="http://schemas.openxmlformats.org/drawingml/2006/main">
+            <a:off x="6210300" y="4610100"/>
+            <a:ext cx="304800" cy="304800"/>
+          </a:xfrm>
+          <a:prstGeom xmlns:a="http://schemas.openxmlformats.org/drawingml/2006/main" prst="ellipse">
+            <a:avLst/>
+          </a:prstGeom>
+          <a:solidFill xmlns:a="http://schemas.openxmlformats.org/drawingml/2006/main">
+            <a:srgbClr val="202522"/>
+          </a:solidFill>
+          <a:ln xmlns:a="http://schemas.openxmlformats.org/drawingml/2006/main" w="25400">
+            <a:solidFill>
+              <a:srgbClr val="EEF4EE"/>
+            </a:solidFill>
+            <a:prstDash val="solid"/>
+          </a:ln>
+        </p:spPr>
+        <p:txBody>
+          <a:bodyPr xmlns:a="http://schemas.openxmlformats.org/drawingml/2006/main" wrap="square" lIns="0" tIns="0" rIns="0" bIns="0" anchor="t"/>
+          <a:lstStyle xmlns:a="http://schemas.openxmlformats.org/drawingml/2006/main"/>
+          <a:p xmlns:a="http://schemas.openxmlformats.org/drawingml/2006/main">
+            <a:r>
+              <a:rPr lang="en-US"/>
+              <a:t/>
+            </a:r>
+            <a:endParaRPr lang="en-US"/>
+          </a:p>
+        </p:txBody>
+      </p:sp>
+      <p:sp>
+        <p:nvSpPr>
+          <p:cNvPr id="30" name="timeline-number-2"/>
+          <p:cNvSpPr txBox="1"/>
+          <p:nvPr/>
+        </p:nvSpPr>
+        <p:spPr>
+          <a:xfrm xmlns:a="http://schemas.openxmlformats.org/drawingml/2006/main">
+            <a:off x="6096000" y="4076700"/>
+            <a:ext cx="533400" cy="190500"/>
+          </a:xfrm>
+          <a:prstGeom xmlns:a="http://schemas.openxmlformats.org/drawingml/2006/main" prst="rect">
+            <a:avLst/>
+          </a:prstGeom>
+          <a:noFill xmlns:a="http://schemas.openxmlformats.org/drawingml/2006/main"/>
+          <a:ln xmlns:a="http://schemas.openxmlformats.org/drawingml/2006/main" w="0">
+            <a:noFill/>
+          </a:ln>
+        </p:spPr>
+        <p:txBody>
+          <a:bodyPr xmlns:a="http://schemas.openxmlformats.org/drawingml/2006/main" wrap="square" lIns="0" tIns="0" rIns="0" bIns="0" anchor="t"/>
+          <a:lstStyle xmlns:a="http://schemas.openxmlformats.org/drawingml/2006/main"/>
+          <a:p xmlns:a="http://schemas.openxmlformats.org/drawingml/2006/main">
+            <a:pPr algn="ctr"/>
+            <a:r>
+              <a:rPr lang="en-US" sz="975" b="1">
+                <a:solidFill>
+                  <a:srgbClr val="58B88B"/>
+                </a:solidFill>
+                <a:latin typeface="Arial"/>
+                <a:ea typeface="Arial"/>
+              </a:rPr>
+              <a:t>03</a:t>
+            </a:r>
+            <a:endParaRPr lang="en-US"/>
+          </a:p>
+        </p:txBody>
+      </p:sp>
+      <p:sp>
+        <p:nvSpPr>
+          <p:cNvPr id="31" name="timeline-label-2"/>
+          <p:cNvSpPr txBox="1"/>
+          <p:nvPr/>
+        </p:nvSpPr>
+        <p:spPr>
+          <a:xfrm xmlns:a="http://schemas.openxmlformats.org/drawingml/2006/main">
+            <a:off x="5676900" y="5086350"/>
+            <a:ext cx="1371600" cy="228600"/>
+          </a:xfrm>
+          <a:prstGeom xmlns:a="http://schemas.openxmlformats.org/drawingml/2006/main" prst="rect">
+            <a:avLst/>
+          </a:prstGeom>
+          <a:noFill xmlns:a="http://schemas.openxmlformats.org/drawingml/2006/main"/>
+          <a:ln xmlns:a="http://schemas.openxmlformats.org/drawingml/2006/main" w="0">
+            <a:noFill/>
+          </a:ln>
+        </p:spPr>
+        <p:txBody>
+          <a:bodyPr xmlns:a="http://schemas.openxmlformats.org/drawingml/2006/main" wrap="square" lIns="0" tIns="0" rIns="0" bIns="0" anchor="t"/>
+          <a:lstStyle xmlns:a="http://schemas.openxmlformats.org/drawingml/2006/main"/>
+          <a:p xmlns:a="http://schemas.openxmlformats.org/drawingml/2006/main">
+            <a:pPr algn="ctr"/>
+            <a:r>
+              <a:rPr lang="en-US" sz="1350" b="1">
+                <a:solidFill>
+                  <a:srgbClr val="EEF4EE"/>
+                </a:solidFill>
+                <a:latin typeface="Arial"/>
+                <a:ea typeface="Arial"/>
+              </a:rPr>
+              <a:t>Read</a:t>
+            </a:r>
+            <a:endParaRPr lang="en-US"/>
+          </a:p>
+        </p:txBody>
+      </p:sp>
+      <p:sp>
+        <p:nvSpPr>
+          <p:cNvPr id="32" name="timeline-text-2"/>
+          <p:cNvSpPr txBox="1"/>
+          <p:nvPr/>
+        </p:nvSpPr>
+        <p:spPr>
+          <a:xfrm xmlns:a="http://schemas.openxmlformats.org/drawingml/2006/main">
+            <a:off x="5467350" y="5391150"/>
+            <a:ext cx="1790700" cy="361950"/>
+          </a:xfrm>
+          <a:prstGeom xmlns:a="http://schemas.openxmlformats.org/drawingml/2006/main" prst="rect">
+            <a:avLst/>
+          </a:prstGeom>
+          <a:noFill xmlns:a="http://schemas.openxmlformats.org/drawingml/2006/main"/>
+          <a:ln xmlns:a="http://schemas.openxmlformats.org/drawingml/2006/main" w="0">
+            <a:noFill/>
+          </a:ln>
+        </p:spPr>
+        <p:txBody>
+          <a:bodyPr xmlns:a="http://schemas.openxmlformats.org/drawingml/2006/main" wrap="square" lIns="0" tIns="0" rIns="0" bIns="0" anchor="t"/>
+          <a:lstStyle xmlns:a="http://schemas.openxmlformats.org/drawingml/2006/main"/>
+          <a:p xmlns:a="http://schemas.openxmlformats.org/drawingml/2006/main">
+            <a:pPr algn="ctr"/>
+            <a:r>
+              <a:rPr lang="en-US" sz="1050">
+                <a:solidFill>
+                  <a:srgbClr val="838884"/>
+                </a:solidFill>
+                <a:latin typeface="Arial"/>
+                <a:ea typeface="Arial"/>
+              </a:rPr>
+              <a:t>Separate signal</a:t>
+            </a:r>
+            <a:endParaRPr lang="en-US"/>
+          </a:p>
+        </p:txBody>
+      </p:sp>
+      <p:sp>
+        <p:nvSpPr>
+          <p:cNvPr id="33" name="timeline-node-3"/>
+          <p:cNvSpPr/>
+          <p:nvPr/>
+        </p:nvSpPr>
+        <p:spPr>
+          <a:xfrm xmlns:a="http://schemas.openxmlformats.org/drawingml/2006/main">
+            <a:off x="8782050" y="4610100"/>
+            <a:ext cx="304800" cy="304800"/>
+          </a:xfrm>
+          <a:prstGeom xmlns:a="http://schemas.openxmlformats.org/drawingml/2006/main" prst="ellipse">
+            <a:avLst/>
+          </a:prstGeom>
+          <a:solidFill xmlns:a="http://schemas.openxmlformats.org/drawingml/2006/main">
+            <a:srgbClr val="202522"/>
+          </a:solidFill>
+          <a:ln xmlns:a="http://schemas.openxmlformats.org/drawingml/2006/main" w="25400">
+            <a:solidFill>
+              <a:srgbClr val="EEF4EE"/>
+            </a:solidFill>
+            <a:prstDash val="solid"/>
+          </a:ln>
+        </p:spPr>
+        <p:txBody>
+          <a:bodyPr xmlns:a="http://schemas.openxmlformats.org/drawingml/2006/main" wrap="square" lIns="0" tIns="0" rIns="0" bIns="0" anchor="t"/>
+          <a:lstStyle xmlns:a="http://schemas.openxmlformats.org/drawingml/2006/main"/>
+          <a:p xmlns:a="http://schemas.openxmlformats.org/drawingml/2006/main">
+            <a:r>
+              <a:rPr lang="en-US"/>
+              <a:t/>
+            </a:r>
+            <a:endParaRPr lang="en-US"/>
+          </a:p>
+        </p:txBody>
+      </p:sp>
+      <p:sp>
+        <p:nvSpPr>
+          <p:cNvPr id="34" name="timeline-number-3"/>
+          <p:cNvSpPr txBox="1"/>
+          <p:nvPr/>
+        </p:nvSpPr>
+        <p:spPr>
+          <a:xfrm xmlns:a="http://schemas.openxmlformats.org/drawingml/2006/main">
+            <a:off x="8667750" y="4076700"/>
+            <a:ext cx="533400" cy="190500"/>
+          </a:xfrm>
+          <a:prstGeom xmlns:a="http://schemas.openxmlformats.org/drawingml/2006/main" prst="rect">
+            <a:avLst/>
+          </a:prstGeom>
+          <a:noFill xmlns:a="http://schemas.openxmlformats.org/drawingml/2006/main"/>
+          <a:ln xmlns:a="http://schemas.openxmlformats.org/drawingml/2006/main" w="0">
+            <a:noFill/>
+          </a:ln>
+        </p:spPr>
+        <p:txBody>
+          <a:bodyPr xmlns:a="http://schemas.openxmlformats.org/drawingml/2006/main" wrap="square" lIns="0" tIns="0" rIns="0" bIns="0" anchor="t"/>
+          <a:lstStyle xmlns:a="http://schemas.openxmlformats.org/drawingml/2006/main"/>
+          <a:p xmlns:a="http://schemas.openxmlformats.org/drawingml/2006/main">
+            <a:pPr algn="ctr"/>
+            <a:r>
+              <a:rPr lang="en-US" sz="975" b="1">
+                <a:solidFill>
+                  <a:srgbClr val="58B88B"/>
+                </a:solidFill>
+                <a:latin typeface="Arial"/>
+                <a:ea typeface="Arial"/>
+              </a:rPr>
+              <a:t>04</a:t>
+            </a:r>
+            <a:endParaRPr lang="en-US"/>
+          </a:p>
+        </p:txBody>
+      </p:sp>
+      <p:sp>
+        <p:nvSpPr>
+          <p:cNvPr id="35" name="timeline-label-3"/>
+          <p:cNvSpPr txBox="1"/>
+          <p:nvPr/>
+        </p:nvSpPr>
+        <p:spPr>
+          <a:xfrm xmlns:a="http://schemas.openxmlformats.org/drawingml/2006/main">
+            <a:off x="8248650" y="5086350"/>
+            <a:ext cx="1371600" cy="228600"/>
+          </a:xfrm>
+          <a:prstGeom xmlns:a="http://schemas.openxmlformats.org/drawingml/2006/main" prst="rect">
+            <a:avLst/>
+          </a:prstGeom>
+          <a:noFill xmlns:a="http://schemas.openxmlformats.org/drawingml/2006/main"/>
+          <a:ln xmlns:a="http://schemas.openxmlformats.org/drawingml/2006/main" w="0">
+            <a:noFill/>
+          </a:ln>
+        </p:spPr>
+        <p:txBody>
+          <a:bodyPr xmlns:a="http://schemas.openxmlformats.org/drawingml/2006/main" wrap="square" lIns="0" tIns="0" rIns="0" bIns="0" anchor="t"/>
+          <a:lstStyle xmlns:a="http://schemas.openxmlformats.org/drawingml/2006/main"/>
+          <a:p xmlns:a="http://schemas.openxmlformats.org/drawingml/2006/main">
+            <a:pPr algn="ctr"/>
+            <a:r>
+              <a:rPr lang="en-US" sz="1350" b="1">
+                <a:solidFill>
+                  <a:srgbClr val="EEF4EE"/>
+                </a:solidFill>
+                <a:latin typeface="Arial"/>
+                <a:ea typeface="Arial"/>
+              </a:rPr>
+              <a:t>Move</a:t>
+            </a:r>
+            <a:endParaRPr lang="en-US"/>
+          </a:p>
+        </p:txBody>
+      </p:sp>
+      <p:sp>
+        <p:nvSpPr>
+          <p:cNvPr id="36" name="timeline-text-3"/>
+          <p:cNvSpPr txBox="1"/>
+          <p:nvPr/>
+        </p:nvSpPr>
+        <p:spPr>
+          <a:xfrm xmlns:a="http://schemas.openxmlformats.org/drawingml/2006/main">
+            <a:off x="8039100" y="5391150"/>
+            <a:ext cx="1790700" cy="361950"/>
+          </a:xfrm>
+          <a:prstGeom xmlns:a="http://schemas.openxmlformats.org/drawingml/2006/main" prst="rect">
+            <a:avLst/>
+          </a:prstGeom>
+          <a:noFill xmlns:a="http://schemas.openxmlformats.org/drawingml/2006/main"/>
+          <a:ln xmlns:a="http://schemas.openxmlformats.org/drawingml/2006/main" w="0">
+            <a:noFill/>
+          </a:ln>
+        </p:spPr>
+        <p:txBody>
+          <a:bodyPr xmlns:a="http://schemas.openxmlformats.org/drawingml/2006/main" wrap="square" lIns="0" tIns="0" rIns="0" bIns="0" anchor="t"/>
+          <a:lstStyle xmlns:a="http://schemas.openxmlformats.org/drawingml/2006/main"/>
+          <a:p xmlns:a="http://schemas.openxmlformats.org/drawingml/2006/main">
+            <a:pPr algn="ctr"/>
+            <a:r>
+              <a:rPr lang="en-US" sz="1050">
+                <a:solidFill>
+                  <a:srgbClr val="838884"/>
+                </a:solidFill>
+                <a:latin typeface="Arial"/>
+                <a:ea typeface="Arial"/>
+              </a:rPr>
+              <a:t>Set the next gate</a:t>
+            </a:r>
+            <a:endParaRPr lang="en-US"/>
+          </a:p>
+        </p:txBody>
+      </p:sp>
+      <p:sp>
+        <p:nvSpPr>
+          <p:cNvPr id="37" name="timeline-node-4"/>
+          <p:cNvSpPr/>
+          <p:nvPr/>
+        </p:nvSpPr>
+        <p:spPr>
+          <a:xfrm xmlns:a="http://schemas.openxmlformats.org/drawingml/2006/main">
+            <a:off x="11353800" y="4610100"/>
+            <a:ext cx="304800" cy="304800"/>
+          </a:xfrm>
+          <a:prstGeom xmlns:a="http://schemas.openxmlformats.org/drawingml/2006/main" prst="ellipse">
+            <a:avLst/>
+          </a:prstGeom>
+          <a:solidFill xmlns:a="http://schemas.openxmlformats.org/drawingml/2006/main">
+            <a:srgbClr val="58B88B"/>
+          </a:solidFill>
+          <a:ln xmlns:a="http://schemas.openxmlformats.org/drawingml/2006/main" w="25400">
+            <a:solidFill>
               <a:srgbClr val="58B88B"/>
             </a:solidFill>
             <a:prstDash val="solid"/>
@@ -3872,14 +4004,128 @@
       </p:sp>
       <p:sp>
         <p:nvSpPr>
-          <p:cNvPr id="22" name="dense-read-label"/>
-          <p:cNvSpPr txBox="1"/>
-          <p:nvPr/>
-        </p:nvSpPr>
-        <p:spPr>
-          <a:xfrm xmlns:a="http://schemas.openxmlformats.org/drawingml/2006/main">
-            <a:off x="11315700" y="3543300"/>
-            <a:ext cx="2667000" cy="209550"/>
+          <p:cNvPr id="38" name="timeline-number-4"/>
+          <p:cNvSpPr txBox="1"/>
+          <p:nvPr/>
+        </p:nvSpPr>
+        <p:spPr>
+          <a:xfrm xmlns:a="http://schemas.openxmlformats.org/drawingml/2006/main">
+            <a:off x="11239500" y="4076700"/>
+            <a:ext cx="533400" cy="190500"/>
+          </a:xfrm>
+          <a:prstGeom xmlns:a="http://schemas.openxmlformats.org/drawingml/2006/main" prst="rect">
+            <a:avLst/>
+          </a:prstGeom>
+          <a:noFill xmlns:a="http://schemas.openxmlformats.org/drawingml/2006/main"/>
+          <a:ln xmlns:a="http://schemas.openxmlformats.org/drawingml/2006/main" w="0">
+            <a:noFill/>
+          </a:ln>
+        </p:spPr>
+        <p:txBody>
+          <a:bodyPr xmlns:a="http://schemas.openxmlformats.org/drawingml/2006/main" wrap="square" lIns="0" tIns="0" rIns="0" bIns="0" anchor="t"/>
+          <a:lstStyle xmlns:a="http://schemas.openxmlformats.org/drawingml/2006/main"/>
+          <a:p xmlns:a="http://schemas.openxmlformats.org/drawingml/2006/main">
+            <a:pPr algn="ctr"/>
+            <a:r>
+              <a:rPr lang="en-US" sz="975" b="1">
+                <a:solidFill>
+                  <a:srgbClr val="58B88B"/>
+                </a:solidFill>
+                <a:latin typeface="Arial"/>
+                <a:ea typeface="Arial"/>
+              </a:rPr>
+              <a:t>05</a:t>
+            </a:r>
+            <a:endParaRPr lang="en-US"/>
+          </a:p>
+        </p:txBody>
+      </p:sp>
+      <p:sp>
+        <p:nvSpPr>
+          <p:cNvPr id="39" name="timeline-label-4"/>
+          <p:cNvSpPr txBox="1"/>
+          <p:nvPr/>
+        </p:nvSpPr>
+        <p:spPr>
+          <a:xfrm xmlns:a="http://schemas.openxmlformats.org/drawingml/2006/main">
+            <a:off x="10820400" y="5086350"/>
+            <a:ext cx="1371600" cy="228600"/>
+          </a:xfrm>
+          <a:prstGeom xmlns:a="http://schemas.openxmlformats.org/drawingml/2006/main" prst="rect">
+            <a:avLst/>
+          </a:prstGeom>
+          <a:noFill xmlns:a="http://schemas.openxmlformats.org/drawingml/2006/main"/>
+          <a:ln xmlns:a="http://schemas.openxmlformats.org/drawingml/2006/main" w="0">
+            <a:noFill/>
+          </a:ln>
+        </p:spPr>
+        <p:txBody>
+          <a:bodyPr xmlns:a="http://schemas.openxmlformats.org/drawingml/2006/main" wrap="square" lIns="0" tIns="0" rIns="0" bIns="0" anchor="t"/>
+          <a:lstStyle xmlns:a="http://schemas.openxmlformats.org/drawingml/2006/main"/>
+          <a:p xmlns:a="http://schemas.openxmlformats.org/drawingml/2006/main">
+            <a:pPr algn="ctr"/>
+            <a:r>
+              <a:rPr lang="en-US" sz="1350" b="1">
+                <a:solidFill>
+                  <a:srgbClr val="EEF4EE"/>
+                </a:solidFill>
+                <a:latin typeface="Arial"/>
+                <a:ea typeface="Arial"/>
+              </a:rPr>
+              <a:t>Scale</a:t>
+            </a:r>
+            <a:endParaRPr lang="en-US"/>
+          </a:p>
+        </p:txBody>
+      </p:sp>
+      <p:sp>
+        <p:nvSpPr>
+          <p:cNvPr id="40" name="timeline-text-4"/>
+          <p:cNvSpPr txBox="1"/>
+          <p:nvPr/>
+        </p:nvSpPr>
+        <p:spPr>
+          <a:xfrm xmlns:a="http://schemas.openxmlformats.org/drawingml/2006/main">
+            <a:off x="10610850" y="5391150"/>
+            <a:ext cx="1790700" cy="361950"/>
+          </a:xfrm>
+          <a:prstGeom xmlns:a="http://schemas.openxmlformats.org/drawingml/2006/main" prst="rect">
+            <a:avLst/>
+          </a:prstGeom>
+          <a:noFill xmlns:a="http://schemas.openxmlformats.org/drawingml/2006/main"/>
+          <a:ln xmlns:a="http://schemas.openxmlformats.org/drawingml/2006/main" w="0">
+            <a:noFill/>
+          </a:ln>
+        </p:spPr>
+        <p:txBody>
+          <a:bodyPr xmlns:a="http://schemas.openxmlformats.org/drawingml/2006/main" wrap="square" lIns="0" tIns="0" rIns="0" bIns="0" anchor="t"/>
+          <a:lstStyle xmlns:a="http://schemas.openxmlformats.org/drawingml/2006/main"/>
+          <a:p xmlns:a="http://schemas.openxmlformats.org/drawingml/2006/main">
+            <a:pPr algn="ctr"/>
+            <a:r>
+              <a:rPr lang="en-US" sz="1050">
+                <a:solidFill>
+                  <a:srgbClr val="838884"/>
+                </a:solidFill>
+                <a:latin typeface="Arial"/>
+                <a:ea typeface="Arial"/>
+              </a:rPr>
+              <a:t>Repeat what held</a:t>
+            </a:r>
+            <a:endParaRPr lang="en-US"/>
+          </a:p>
+        </p:txBody>
+      </p:sp>
+      <p:sp>
+        <p:nvSpPr>
+          <p:cNvPr id="41" name="timeline-read-label"/>
+          <p:cNvSpPr txBox="1"/>
+          <p:nvPr/>
+        </p:nvSpPr>
+        <p:spPr>
+          <a:xfrm xmlns:a="http://schemas.openxmlformats.org/drawingml/2006/main">
+            <a:off x="1066800" y="6667500"/>
+            <a:ext cx="2286000" cy="209550"/>
           </a:xfrm>
           <a:prstGeom xmlns:a="http://schemas.openxmlformats.org/drawingml/2006/main" prst="rect">
             <a:avLst/>
@@ -3909,81 +4155,44 @@
       </p:sp>
       <p:sp>
         <p:nvSpPr>
-          <p:cNvPr id="23" name="dense-read-title"/>
-          <p:cNvSpPr txBox="1"/>
-          <p:nvPr/>
-        </p:nvSpPr>
-        <p:spPr>
-          <a:xfrm xmlns:a="http://schemas.openxmlformats.org/drawingml/2006/main">
-            <a:off x="11315700" y="4000500"/>
-            <a:ext cx="2667000" cy="685800"/>
-          </a:xfrm>
-          <a:prstGeom xmlns:a="http://schemas.openxmlformats.org/drawingml/2006/main" prst="rect">
-            <a:avLst/>
-          </a:prstGeom>
-          <a:noFill xmlns:a="http://schemas.openxmlformats.org/drawingml/2006/main"/>
-          <a:ln xmlns:a="http://schemas.openxmlformats.org/drawingml/2006/main" w="0">
-            <a:noFill/>
-          </a:ln>
-        </p:spPr>
-        <p:txBody>
-          <a:bodyPr xmlns:a="http://schemas.openxmlformats.org/drawingml/2006/main" wrap="square" lIns="0" tIns="0" rIns="0" bIns="0" anchor="t"/>
-          <a:lstStyle xmlns:a="http://schemas.openxmlformats.org/drawingml/2006/main"/>
-          <a:p xmlns:a="http://schemas.openxmlformats.org/drawingml/2006/main">
-            <a:r>
-              <a:rPr lang="en-US" sz="1725" b="1">
+          <p:cNvPr id="42" name="timeline-read"/>
+          <p:cNvSpPr txBox="1"/>
+          <p:nvPr/>
+        </p:nvSpPr>
+        <p:spPr>
+          <a:xfrm xmlns:a="http://schemas.openxmlformats.org/drawingml/2006/main">
+            <a:off x="3333750" y="6629400"/>
+            <a:ext cx="8191500" cy="266700"/>
+          </a:xfrm>
+          <a:prstGeom xmlns:a="http://schemas.openxmlformats.org/drawingml/2006/main" prst="rect">
+            <a:avLst/>
+          </a:prstGeom>
+          <a:noFill xmlns:a="http://schemas.openxmlformats.org/drawingml/2006/main"/>
+          <a:ln xmlns:a="http://schemas.openxmlformats.org/drawingml/2006/main" w="0">
+            <a:noFill/>
+          </a:ln>
+        </p:spPr>
+        <p:txBody>
+          <a:bodyPr xmlns:a="http://schemas.openxmlformats.org/drawingml/2006/main" wrap="square" lIns="0" tIns="0" rIns="0" bIns="0" anchor="t"/>
+          <a:lstStyle xmlns:a="http://schemas.openxmlformats.org/drawingml/2006/main"/>
+          <a:p xmlns:a="http://schemas.openxmlformats.org/drawingml/2006/main">
+            <a:r>
+              <a:rPr lang="en-US" sz="1425" b="1">
                 <a:solidFill>
                   <a:srgbClr val="EEF4EE"/>
                 </a:solidFill>
                 <a:latin typeface="Arial"/>
                 <a:ea typeface="Arial"/>
               </a:rPr>
-              <a:t>The comparison narrows the move.</a:t>
-            </a:r>
-            <a:endParaRPr lang="en-US"/>
-          </a:p>
-        </p:txBody>
-      </p:sp>
-      <p:sp>
-        <p:nvSpPr>
-          <p:cNvPr id="24" name="dense-read-body"/>
-          <p:cNvSpPr txBox="1"/>
-          <p:nvPr/>
-        </p:nvSpPr>
-        <p:spPr>
-          <a:xfrm xmlns:a="http://schemas.openxmlformats.org/drawingml/2006/main">
-            <a:off x="11315700" y="4953000"/>
-            <a:ext cx="2667000" cy="819150"/>
-          </a:xfrm>
-          <a:prstGeom xmlns:a="http://schemas.openxmlformats.org/drawingml/2006/main" prst="rect">
-            <a:avLst/>
-          </a:prstGeom>
-          <a:noFill xmlns:a="http://schemas.openxmlformats.org/drawingml/2006/main"/>
-          <a:ln xmlns:a="http://schemas.openxmlformats.org/drawingml/2006/main" w="0">
-            <a:noFill/>
-          </a:ln>
-        </p:spPr>
-        <p:txBody>
-          <a:bodyPr xmlns:a="http://schemas.openxmlformats.org/drawingml/2006/main" wrap="square" lIns="0" tIns="0" rIns="0" bIns="0" anchor="t"/>
-          <a:lstStyle xmlns:a="http://schemas.openxmlformats.org/drawingml/2006/main"/>
-          <a:p xmlns:a="http://schemas.openxmlformats.org/drawingml/2006/main">
-            <a:r>
-              <a:rPr lang="en-US" sz="1200">
-                <a:solidFill>
-                  <a:srgbClr val="838884"/>
-                </a:solidFill>
-                <a:latin typeface="Arial"/>
-                <a:ea typeface="Arial"/>
-              </a:rPr>
-              <a:t>Locate the constraint; choose the lever.</a:t>
-            </a:r>
-            <a:endParaRPr lang="en-US"/>
-          </a:p>
-        </p:txBody>
-      </p:sp>
-      <p:sp>
-        <p:nvSpPr>
-          <p:cNvPr id="25" name="evidence-band"/>
+              <a:t>A sequence is useful when each handoff changes what can happen next.</a:t>
+            </a:r>
+            <a:endParaRPr lang="en-US"/>
+          </a:p>
+        </p:txBody>
+      </p:sp>
+      <p:sp>
+        <p:nvSpPr>
+          <p:cNvPr id="43" name="evidence-band"/>
           <p:cNvSpPr/>
           <p:nvPr/>
         </p:nvSpPr>
@@ -4019,7 +4228,7 @@
       </p:sp>
       <p:sp>
         <p:nvSpPr>
-          <p:cNvPr id="26" name="evidence-band-text"/>
+          <p:cNvPr id="44" name="evidence-band-text"/>
           <p:cNvSpPr txBox="1"/>
           <p:nvPr/>
         </p:nvSpPr>
@@ -4056,7 +4265,7 @@
       </p:sp>
       <p:sp>
         <p:nvSpPr>
-          <p:cNvPr id="27" name="source"/>
+          <p:cNvPr id="45" name="source"/>
           <p:cNvSpPr txBox="1"/>
           <p:nvPr/>
         </p:nvSpPr>
@@ -4093,7 +4302,7 @@
       </p:sp>
       <p:sp>
         <p:nvSpPr>
-          <p:cNvPr id="28" name="page-number"/>
+          <p:cNvPr id="46" name="page-number"/>
           <p:cNvSpPr txBox="1"/>
           <p:nvPr/>
         </p:nvSpPr>
@@ -6078,45 +6287,780 @@
           </a:p>
         </p:txBody>
       </p:sp>
-      <p:graphicFrame>
-        <p:nvGraphicFramePr>
-          <p:cNvPr id="19" name="dense-visual-bars"/>
-          <p:cNvGraphicFramePr>
-            <a:graphicFrameLocks xmlns:a="http://schemas.openxmlformats.org/drawingml/2006/main" noGrp="1"/>
-          </p:cNvGraphicFramePr>
-          <p:nvPr/>
-        </p:nvGraphicFramePr>
-        <p:xfrm>
-          <a:off xmlns:a="http://schemas.openxmlformats.org/drawingml/2006/main" x="914400" y="3028950"/>
-          <a:ext xmlns:a="http://schemas.openxmlformats.org/drawingml/2006/main" cx="5334000" cy="3143250"/>
-        </p:xfrm>
-        <a:graphic xmlns:a="http://schemas.openxmlformats.org/drawingml/2006/main">
-          <a:graphicData uri="http://schemas.openxmlformats.org/drawingml/2006/chart">
-            <c:chart xmlns:r="http://schemas.openxmlformats.org/officeDocument/2006/relationships" xmlns:c="http://schemas.openxmlformats.org/drawingml/2006/chart" r:id="Rcac82c6e64514e45"/>
-          </a:graphicData>
-        </a:graphic>
-      </p:graphicFrame>
-      <p:graphicFrame>
-        <p:nvGraphicFramePr>
-          <p:cNvPr id="20" name="dense-visual-line"/>
-          <p:cNvGraphicFramePr>
-            <a:graphicFrameLocks xmlns:a="http://schemas.openxmlformats.org/drawingml/2006/main" noGrp="1"/>
-          </p:cNvGraphicFramePr>
-          <p:nvPr/>
-        </p:nvGraphicFramePr>
-        <p:xfrm>
-          <a:off xmlns:a="http://schemas.openxmlformats.org/drawingml/2006/main" x="6667500" y="3028950"/>
-          <a:ext xmlns:a="http://schemas.openxmlformats.org/drawingml/2006/main" cx="3810000" cy="3143250"/>
-        </p:xfrm>
-        <a:graphic xmlns:a="http://schemas.openxmlformats.org/drawingml/2006/main">
-          <a:graphicData uri="http://schemas.openxmlformats.org/drawingml/2006/chart">
-            <c:chart xmlns:r="http://schemas.openxmlformats.org/officeDocument/2006/relationships" xmlns:c="http://schemas.openxmlformats.org/drawingml/2006/chart" r:id="Rdba97b790c704057"/>
-          </a:graphicData>
-        </a:graphic>
-      </p:graphicFrame>
-      <p:sp>
-        <p:nvSpPr>
-          <p:cNvPr id="21" name="visual-note"/>
+      <p:sp>
+        <p:nvSpPr>
+          <p:cNvPr id="19" name="visual-process-rail"/>
+          <p:cNvSpPr/>
+          <p:nvPr/>
+        </p:nvSpPr>
+        <p:spPr>
+          <a:xfrm xmlns:a="http://schemas.openxmlformats.org/drawingml/2006/main">
+            <a:off x="1447800" y="3524250"/>
+            <a:ext cx="0" cy="2647950"/>
+          </a:xfrm>
+          <a:prstGeom xmlns:a="http://schemas.openxmlformats.org/drawingml/2006/main" prst="line">
+            <a:avLst/>
+          </a:prstGeom>
+          <a:noFill xmlns:a="http://schemas.openxmlformats.org/drawingml/2006/main"/>
+          <a:ln xmlns:a="http://schemas.openxmlformats.org/drawingml/2006/main" w="25400">
+            <a:solidFill>
+              <a:srgbClr val="838884"/>
+            </a:solidFill>
+            <a:prstDash val="solid"/>
+          </a:ln>
+        </p:spPr>
+        <p:txBody>
+          <a:bodyPr xmlns:a="http://schemas.openxmlformats.org/drawingml/2006/main" wrap="square" lIns="0" tIns="0" rIns="0" bIns="0" anchor="t"/>
+          <a:lstStyle xmlns:a="http://schemas.openxmlformats.org/drawingml/2006/main"/>
+          <a:p xmlns:a="http://schemas.openxmlformats.org/drawingml/2006/main">
+            <a:r>
+              <a:rPr lang="en-US"/>
+              <a:t/>
+            </a:r>
+            <a:endParaRPr lang="en-US"/>
+          </a:p>
+        </p:txBody>
+      </p:sp>
+      <p:sp>
+        <p:nvSpPr>
+          <p:cNvPr id="20" name="visual-process-node-0"/>
+          <p:cNvSpPr/>
+          <p:nvPr/>
+        </p:nvSpPr>
+        <p:spPr>
+          <a:xfrm xmlns:a="http://schemas.openxmlformats.org/drawingml/2006/main">
+            <a:off x="1257300" y="3352800"/>
+            <a:ext cx="400050" cy="400050"/>
+          </a:xfrm>
+          <a:prstGeom xmlns:a="http://schemas.openxmlformats.org/drawingml/2006/main" prst="ellipse">
+            <a:avLst/>
+          </a:prstGeom>
+          <a:solidFill xmlns:a="http://schemas.openxmlformats.org/drawingml/2006/main">
+            <a:srgbClr val="202522"/>
+          </a:solidFill>
+          <a:ln xmlns:a="http://schemas.openxmlformats.org/drawingml/2006/main" w="38100">
+            <a:solidFill>
+              <a:srgbClr val="EEF4EE"/>
+            </a:solidFill>
+            <a:prstDash val="solid"/>
+          </a:ln>
+        </p:spPr>
+        <p:txBody>
+          <a:bodyPr xmlns:a="http://schemas.openxmlformats.org/drawingml/2006/main" wrap="square" lIns="0" tIns="0" rIns="0" bIns="0" anchor="t"/>
+          <a:lstStyle xmlns:a="http://schemas.openxmlformats.org/drawingml/2006/main"/>
+          <a:p xmlns:a="http://schemas.openxmlformats.org/drawingml/2006/main">
+            <a:r>
+              <a:rPr lang="en-US"/>
+              <a:t/>
+            </a:r>
+            <a:endParaRPr lang="en-US"/>
+          </a:p>
+        </p:txBody>
+      </p:sp>
+      <p:sp>
+        <p:nvSpPr>
+          <p:cNvPr id="21" name="visual-process-number-0"/>
+          <p:cNvSpPr txBox="1"/>
+          <p:nvPr/>
+        </p:nvSpPr>
+        <p:spPr>
+          <a:xfrm xmlns:a="http://schemas.openxmlformats.org/drawingml/2006/main">
+            <a:off x="1238250" y="3467100"/>
+            <a:ext cx="438150" cy="152400"/>
+          </a:xfrm>
+          <a:prstGeom xmlns:a="http://schemas.openxmlformats.org/drawingml/2006/main" prst="rect">
+            <a:avLst/>
+          </a:prstGeom>
+          <a:noFill xmlns:a="http://schemas.openxmlformats.org/drawingml/2006/main"/>
+          <a:ln xmlns:a="http://schemas.openxmlformats.org/drawingml/2006/main" w="0">
+            <a:noFill/>
+          </a:ln>
+        </p:spPr>
+        <p:txBody>
+          <a:bodyPr xmlns:a="http://schemas.openxmlformats.org/drawingml/2006/main" wrap="square" lIns="0" tIns="0" rIns="0" bIns="0" anchor="t"/>
+          <a:lstStyle xmlns:a="http://schemas.openxmlformats.org/drawingml/2006/main"/>
+          <a:p xmlns:a="http://schemas.openxmlformats.org/drawingml/2006/main">
+            <a:pPr algn="ctr"/>
+            <a:r>
+              <a:rPr lang="en-US" sz="900" b="1">
+                <a:solidFill>
+                  <a:srgbClr val="58B88B"/>
+                </a:solidFill>
+                <a:latin typeface="Arial"/>
+                <a:ea typeface="Arial"/>
+              </a:rPr>
+              <a:t>01</a:t>
+            </a:r>
+            <a:endParaRPr lang="en-US"/>
+          </a:p>
+        </p:txBody>
+      </p:sp>
+      <p:sp>
+        <p:nvSpPr>
+          <p:cNvPr id="22" name="visual-process-label-0"/>
+          <p:cNvSpPr txBox="1"/>
+          <p:nvPr/>
+        </p:nvSpPr>
+        <p:spPr>
+          <a:xfrm xmlns:a="http://schemas.openxmlformats.org/drawingml/2006/main">
+            <a:off x="1943100" y="3371850"/>
+            <a:ext cx="1714500" cy="228600"/>
+          </a:xfrm>
+          <a:prstGeom xmlns:a="http://schemas.openxmlformats.org/drawingml/2006/main" prst="rect">
+            <a:avLst/>
+          </a:prstGeom>
+          <a:noFill xmlns:a="http://schemas.openxmlformats.org/drawingml/2006/main"/>
+          <a:ln xmlns:a="http://schemas.openxmlformats.org/drawingml/2006/main" w="0">
+            <a:noFill/>
+          </a:ln>
+        </p:spPr>
+        <p:txBody>
+          <a:bodyPr xmlns:a="http://schemas.openxmlformats.org/drawingml/2006/main" wrap="square" lIns="0" tIns="0" rIns="0" bIns="0" anchor="t"/>
+          <a:lstStyle xmlns:a="http://schemas.openxmlformats.org/drawingml/2006/main"/>
+          <a:p xmlns:a="http://schemas.openxmlformats.org/drawingml/2006/main">
+            <a:r>
+              <a:rPr lang="en-US" sz="1650" b="1">
+                <a:solidFill>
+                  <a:srgbClr val="EEF4EE"/>
+                </a:solidFill>
+                <a:latin typeface="Arial"/>
+                <a:ea typeface="Arial"/>
+              </a:rPr>
+              <a:t>Observe</a:t>
+            </a:r>
+            <a:endParaRPr lang="en-US"/>
+          </a:p>
+        </p:txBody>
+      </p:sp>
+      <p:sp>
+        <p:nvSpPr>
+          <p:cNvPr id="23" name="visual-process-text-0"/>
+          <p:cNvSpPr txBox="1"/>
+          <p:nvPr/>
+        </p:nvSpPr>
+        <p:spPr>
+          <a:xfrm xmlns:a="http://schemas.openxmlformats.org/drawingml/2006/main">
+            <a:off x="3829050" y="3400425"/>
+            <a:ext cx="2476500" cy="228600"/>
+          </a:xfrm>
+          <a:prstGeom xmlns:a="http://schemas.openxmlformats.org/drawingml/2006/main" prst="rect">
+            <a:avLst/>
+          </a:prstGeom>
+          <a:noFill xmlns:a="http://schemas.openxmlformats.org/drawingml/2006/main"/>
+          <a:ln xmlns:a="http://schemas.openxmlformats.org/drawingml/2006/main" w="0">
+            <a:noFill/>
+          </a:ln>
+        </p:spPr>
+        <p:txBody>
+          <a:bodyPr xmlns:a="http://schemas.openxmlformats.org/drawingml/2006/main" wrap="square" lIns="0" tIns="0" rIns="0" bIns="0" anchor="t"/>
+          <a:lstStyle xmlns:a="http://schemas.openxmlformats.org/drawingml/2006/main"/>
+          <a:p xmlns:a="http://schemas.openxmlformats.org/drawingml/2006/main">
+            <a:r>
+              <a:rPr lang="en-US" sz="1275">
+                <a:solidFill>
+                  <a:srgbClr val="838884"/>
+                </a:solidFill>
+                <a:latin typeface="Arial"/>
+                <a:ea typeface="Arial"/>
+              </a:rPr>
+              <a:t>Find the signal</a:t>
+            </a:r>
+            <a:endParaRPr lang="en-US"/>
+          </a:p>
+        </p:txBody>
+      </p:sp>
+      <p:sp>
+        <p:nvSpPr>
+          <p:cNvPr id="24" name="visual-process-node-1"/>
+          <p:cNvSpPr/>
+          <p:nvPr/>
+        </p:nvSpPr>
+        <p:spPr>
+          <a:xfrm xmlns:a="http://schemas.openxmlformats.org/drawingml/2006/main">
+            <a:off x="1257300" y="4095750"/>
+            <a:ext cx="400050" cy="400050"/>
+          </a:xfrm>
+          <a:prstGeom xmlns:a="http://schemas.openxmlformats.org/drawingml/2006/main" prst="ellipse">
+            <a:avLst/>
+          </a:prstGeom>
+          <a:solidFill xmlns:a="http://schemas.openxmlformats.org/drawingml/2006/main">
+            <a:srgbClr val="202522"/>
+          </a:solidFill>
+          <a:ln xmlns:a="http://schemas.openxmlformats.org/drawingml/2006/main" w="38100">
+            <a:solidFill>
+              <a:srgbClr val="EEF4EE"/>
+            </a:solidFill>
+            <a:prstDash val="solid"/>
+          </a:ln>
+        </p:spPr>
+        <p:txBody>
+          <a:bodyPr xmlns:a="http://schemas.openxmlformats.org/drawingml/2006/main" wrap="square" lIns="0" tIns="0" rIns="0" bIns="0" anchor="t"/>
+          <a:lstStyle xmlns:a="http://schemas.openxmlformats.org/drawingml/2006/main"/>
+          <a:p xmlns:a="http://schemas.openxmlformats.org/drawingml/2006/main">
+            <a:r>
+              <a:rPr lang="en-US"/>
+              <a:t/>
+            </a:r>
+            <a:endParaRPr lang="en-US"/>
+          </a:p>
+        </p:txBody>
+      </p:sp>
+      <p:sp>
+        <p:nvSpPr>
+          <p:cNvPr id="25" name="visual-process-number-1"/>
+          <p:cNvSpPr txBox="1"/>
+          <p:nvPr/>
+        </p:nvSpPr>
+        <p:spPr>
+          <a:xfrm xmlns:a="http://schemas.openxmlformats.org/drawingml/2006/main">
+            <a:off x="1238250" y="4210050"/>
+            <a:ext cx="438150" cy="152400"/>
+          </a:xfrm>
+          <a:prstGeom xmlns:a="http://schemas.openxmlformats.org/drawingml/2006/main" prst="rect">
+            <a:avLst/>
+          </a:prstGeom>
+          <a:noFill xmlns:a="http://schemas.openxmlformats.org/drawingml/2006/main"/>
+          <a:ln xmlns:a="http://schemas.openxmlformats.org/drawingml/2006/main" w="0">
+            <a:noFill/>
+          </a:ln>
+        </p:spPr>
+        <p:txBody>
+          <a:bodyPr xmlns:a="http://schemas.openxmlformats.org/drawingml/2006/main" wrap="square" lIns="0" tIns="0" rIns="0" bIns="0" anchor="t"/>
+          <a:lstStyle xmlns:a="http://schemas.openxmlformats.org/drawingml/2006/main"/>
+          <a:p xmlns:a="http://schemas.openxmlformats.org/drawingml/2006/main">
+            <a:pPr algn="ctr"/>
+            <a:r>
+              <a:rPr lang="en-US" sz="900" b="1">
+                <a:solidFill>
+                  <a:srgbClr val="58B88B"/>
+                </a:solidFill>
+                <a:latin typeface="Arial"/>
+                <a:ea typeface="Arial"/>
+              </a:rPr>
+              <a:t>02</a:t>
+            </a:r>
+            <a:endParaRPr lang="en-US"/>
+          </a:p>
+        </p:txBody>
+      </p:sp>
+      <p:sp>
+        <p:nvSpPr>
+          <p:cNvPr id="26" name="visual-process-label-1"/>
+          <p:cNvSpPr txBox="1"/>
+          <p:nvPr/>
+        </p:nvSpPr>
+        <p:spPr>
+          <a:xfrm xmlns:a="http://schemas.openxmlformats.org/drawingml/2006/main">
+            <a:off x="1943100" y="4114800"/>
+            <a:ext cx="1714500" cy="228600"/>
+          </a:xfrm>
+          <a:prstGeom xmlns:a="http://schemas.openxmlformats.org/drawingml/2006/main" prst="rect">
+            <a:avLst/>
+          </a:prstGeom>
+          <a:noFill xmlns:a="http://schemas.openxmlformats.org/drawingml/2006/main"/>
+          <a:ln xmlns:a="http://schemas.openxmlformats.org/drawingml/2006/main" w="0">
+            <a:noFill/>
+          </a:ln>
+        </p:spPr>
+        <p:txBody>
+          <a:bodyPr xmlns:a="http://schemas.openxmlformats.org/drawingml/2006/main" wrap="square" lIns="0" tIns="0" rIns="0" bIns="0" anchor="t"/>
+          <a:lstStyle xmlns:a="http://schemas.openxmlformats.org/drawingml/2006/main"/>
+          <a:p xmlns:a="http://schemas.openxmlformats.org/drawingml/2006/main">
+            <a:r>
+              <a:rPr lang="en-US" sz="1650" b="1">
+                <a:solidFill>
+                  <a:srgbClr val="EEF4EE"/>
+                </a:solidFill>
+                <a:latin typeface="Arial"/>
+                <a:ea typeface="Arial"/>
+              </a:rPr>
+              <a:t>Explain</a:t>
+            </a:r>
+            <a:endParaRPr lang="en-US"/>
+          </a:p>
+        </p:txBody>
+      </p:sp>
+      <p:sp>
+        <p:nvSpPr>
+          <p:cNvPr id="27" name="visual-process-text-1"/>
+          <p:cNvSpPr txBox="1"/>
+          <p:nvPr/>
+        </p:nvSpPr>
+        <p:spPr>
+          <a:xfrm xmlns:a="http://schemas.openxmlformats.org/drawingml/2006/main">
+            <a:off x="3829050" y="4143375"/>
+            <a:ext cx="2476500" cy="228600"/>
+          </a:xfrm>
+          <a:prstGeom xmlns:a="http://schemas.openxmlformats.org/drawingml/2006/main" prst="rect">
+            <a:avLst/>
+          </a:prstGeom>
+          <a:noFill xmlns:a="http://schemas.openxmlformats.org/drawingml/2006/main"/>
+          <a:ln xmlns:a="http://schemas.openxmlformats.org/drawingml/2006/main" w="0">
+            <a:noFill/>
+          </a:ln>
+        </p:spPr>
+        <p:txBody>
+          <a:bodyPr xmlns:a="http://schemas.openxmlformats.org/drawingml/2006/main" wrap="square" lIns="0" tIns="0" rIns="0" bIns="0" anchor="t"/>
+          <a:lstStyle xmlns:a="http://schemas.openxmlformats.org/drawingml/2006/main"/>
+          <a:p xmlns:a="http://schemas.openxmlformats.org/drawingml/2006/main">
+            <a:r>
+              <a:rPr lang="en-US" sz="1275">
+                <a:solidFill>
+                  <a:srgbClr val="838884"/>
+                </a:solidFill>
+                <a:latin typeface="Arial"/>
+                <a:ea typeface="Arial"/>
+              </a:rPr>
+              <a:t>Name the mechanism</a:t>
+            </a:r>
+            <a:endParaRPr lang="en-US"/>
+          </a:p>
+        </p:txBody>
+      </p:sp>
+      <p:sp>
+        <p:nvSpPr>
+          <p:cNvPr id="28" name="visual-process-node-2"/>
+          <p:cNvSpPr/>
+          <p:nvPr/>
+        </p:nvSpPr>
+        <p:spPr>
+          <a:xfrm xmlns:a="http://schemas.openxmlformats.org/drawingml/2006/main">
+            <a:off x="1257300" y="4838700"/>
+            <a:ext cx="400050" cy="400050"/>
+          </a:xfrm>
+          <a:prstGeom xmlns:a="http://schemas.openxmlformats.org/drawingml/2006/main" prst="ellipse">
+            <a:avLst/>
+          </a:prstGeom>
+          <a:solidFill xmlns:a="http://schemas.openxmlformats.org/drawingml/2006/main">
+            <a:srgbClr val="202522"/>
+          </a:solidFill>
+          <a:ln xmlns:a="http://schemas.openxmlformats.org/drawingml/2006/main" w="38100">
+            <a:solidFill>
+              <a:srgbClr val="EEF4EE"/>
+            </a:solidFill>
+            <a:prstDash val="solid"/>
+          </a:ln>
+        </p:spPr>
+        <p:txBody>
+          <a:bodyPr xmlns:a="http://schemas.openxmlformats.org/drawingml/2006/main" wrap="square" lIns="0" tIns="0" rIns="0" bIns="0" anchor="t"/>
+          <a:lstStyle xmlns:a="http://schemas.openxmlformats.org/drawingml/2006/main"/>
+          <a:p xmlns:a="http://schemas.openxmlformats.org/drawingml/2006/main">
+            <a:r>
+              <a:rPr lang="en-US"/>
+              <a:t/>
+            </a:r>
+            <a:endParaRPr lang="en-US"/>
+          </a:p>
+        </p:txBody>
+      </p:sp>
+      <p:sp>
+        <p:nvSpPr>
+          <p:cNvPr id="29" name="visual-process-number-2"/>
+          <p:cNvSpPr txBox="1"/>
+          <p:nvPr/>
+        </p:nvSpPr>
+        <p:spPr>
+          <a:xfrm xmlns:a="http://schemas.openxmlformats.org/drawingml/2006/main">
+            <a:off x="1238250" y="4953000"/>
+            <a:ext cx="438150" cy="152400"/>
+          </a:xfrm>
+          <a:prstGeom xmlns:a="http://schemas.openxmlformats.org/drawingml/2006/main" prst="rect">
+            <a:avLst/>
+          </a:prstGeom>
+          <a:noFill xmlns:a="http://schemas.openxmlformats.org/drawingml/2006/main"/>
+          <a:ln xmlns:a="http://schemas.openxmlformats.org/drawingml/2006/main" w="0">
+            <a:noFill/>
+          </a:ln>
+        </p:spPr>
+        <p:txBody>
+          <a:bodyPr xmlns:a="http://schemas.openxmlformats.org/drawingml/2006/main" wrap="square" lIns="0" tIns="0" rIns="0" bIns="0" anchor="t"/>
+          <a:lstStyle xmlns:a="http://schemas.openxmlformats.org/drawingml/2006/main"/>
+          <a:p xmlns:a="http://schemas.openxmlformats.org/drawingml/2006/main">
+            <a:pPr algn="ctr"/>
+            <a:r>
+              <a:rPr lang="en-US" sz="900" b="1">
+                <a:solidFill>
+                  <a:srgbClr val="58B88B"/>
+                </a:solidFill>
+                <a:latin typeface="Arial"/>
+                <a:ea typeface="Arial"/>
+              </a:rPr>
+              <a:t>03</a:t>
+            </a:r>
+            <a:endParaRPr lang="en-US"/>
+          </a:p>
+        </p:txBody>
+      </p:sp>
+      <p:sp>
+        <p:nvSpPr>
+          <p:cNvPr id="30" name="visual-process-label-2"/>
+          <p:cNvSpPr txBox="1"/>
+          <p:nvPr/>
+        </p:nvSpPr>
+        <p:spPr>
+          <a:xfrm xmlns:a="http://schemas.openxmlformats.org/drawingml/2006/main">
+            <a:off x="1943100" y="4857750"/>
+            <a:ext cx="1714500" cy="228600"/>
+          </a:xfrm>
+          <a:prstGeom xmlns:a="http://schemas.openxmlformats.org/drawingml/2006/main" prst="rect">
+            <a:avLst/>
+          </a:prstGeom>
+          <a:noFill xmlns:a="http://schemas.openxmlformats.org/drawingml/2006/main"/>
+          <a:ln xmlns:a="http://schemas.openxmlformats.org/drawingml/2006/main" w="0">
+            <a:noFill/>
+          </a:ln>
+        </p:spPr>
+        <p:txBody>
+          <a:bodyPr xmlns:a="http://schemas.openxmlformats.org/drawingml/2006/main" wrap="square" lIns="0" tIns="0" rIns="0" bIns="0" anchor="t"/>
+          <a:lstStyle xmlns:a="http://schemas.openxmlformats.org/drawingml/2006/main"/>
+          <a:p xmlns:a="http://schemas.openxmlformats.org/drawingml/2006/main">
+            <a:r>
+              <a:rPr lang="en-US" sz="1650" b="1">
+                <a:solidFill>
+                  <a:srgbClr val="EEF4EE"/>
+                </a:solidFill>
+                <a:latin typeface="Arial"/>
+                <a:ea typeface="Arial"/>
+              </a:rPr>
+              <a:t>Choose</a:t>
+            </a:r>
+            <a:endParaRPr lang="en-US"/>
+          </a:p>
+        </p:txBody>
+      </p:sp>
+      <p:sp>
+        <p:nvSpPr>
+          <p:cNvPr id="31" name="visual-process-text-2"/>
+          <p:cNvSpPr txBox="1"/>
+          <p:nvPr/>
+        </p:nvSpPr>
+        <p:spPr>
+          <a:xfrm xmlns:a="http://schemas.openxmlformats.org/drawingml/2006/main">
+            <a:off x="3829050" y="4886325"/>
+            <a:ext cx="2476500" cy="228600"/>
+          </a:xfrm>
+          <a:prstGeom xmlns:a="http://schemas.openxmlformats.org/drawingml/2006/main" prst="rect">
+            <a:avLst/>
+          </a:prstGeom>
+          <a:noFill xmlns:a="http://schemas.openxmlformats.org/drawingml/2006/main"/>
+          <a:ln xmlns:a="http://schemas.openxmlformats.org/drawingml/2006/main" w="0">
+            <a:noFill/>
+          </a:ln>
+        </p:spPr>
+        <p:txBody>
+          <a:bodyPr xmlns:a="http://schemas.openxmlformats.org/drawingml/2006/main" wrap="square" lIns="0" tIns="0" rIns="0" bIns="0" anchor="t"/>
+          <a:lstStyle xmlns:a="http://schemas.openxmlformats.org/drawingml/2006/main"/>
+          <a:p xmlns:a="http://schemas.openxmlformats.org/drawingml/2006/main">
+            <a:r>
+              <a:rPr lang="en-US" sz="1275">
+                <a:solidFill>
+                  <a:srgbClr val="838884"/>
+                </a:solidFill>
+                <a:latin typeface="Arial"/>
+                <a:ea typeface="Arial"/>
+              </a:rPr>
+              <a:t>Set the condition</a:t>
+            </a:r>
+            <a:endParaRPr lang="en-US"/>
+          </a:p>
+        </p:txBody>
+      </p:sp>
+      <p:sp>
+        <p:nvSpPr>
+          <p:cNvPr id="32" name="visual-process-node-3"/>
+          <p:cNvSpPr/>
+          <p:nvPr/>
+        </p:nvSpPr>
+        <p:spPr>
+          <a:xfrm xmlns:a="http://schemas.openxmlformats.org/drawingml/2006/main">
+            <a:off x="1257300" y="5581650"/>
+            <a:ext cx="400050" cy="400050"/>
+          </a:xfrm>
+          <a:prstGeom xmlns:a="http://schemas.openxmlformats.org/drawingml/2006/main" prst="ellipse">
+            <a:avLst/>
+          </a:prstGeom>
+          <a:solidFill xmlns:a="http://schemas.openxmlformats.org/drawingml/2006/main">
+            <a:srgbClr val="58B88B"/>
+          </a:solidFill>
+          <a:ln xmlns:a="http://schemas.openxmlformats.org/drawingml/2006/main" w="38100">
+            <a:solidFill>
+              <a:srgbClr val="58B88B"/>
+            </a:solidFill>
+            <a:prstDash val="solid"/>
+          </a:ln>
+        </p:spPr>
+        <p:txBody>
+          <a:bodyPr xmlns:a="http://schemas.openxmlformats.org/drawingml/2006/main" wrap="square" lIns="0" tIns="0" rIns="0" bIns="0" anchor="t"/>
+          <a:lstStyle xmlns:a="http://schemas.openxmlformats.org/drawingml/2006/main"/>
+          <a:p xmlns:a="http://schemas.openxmlformats.org/drawingml/2006/main">
+            <a:r>
+              <a:rPr lang="en-US"/>
+              <a:t/>
+            </a:r>
+            <a:endParaRPr lang="en-US"/>
+          </a:p>
+        </p:txBody>
+      </p:sp>
+      <p:sp>
+        <p:nvSpPr>
+          <p:cNvPr id="33" name="visual-process-number-3"/>
+          <p:cNvSpPr txBox="1"/>
+          <p:nvPr/>
+        </p:nvSpPr>
+        <p:spPr>
+          <a:xfrm xmlns:a="http://schemas.openxmlformats.org/drawingml/2006/main">
+            <a:off x="1238250" y="5695950"/>
+            <a:ext cx="438150" cy="152400"/>
+          </a:xfrm>
+          <a:prstGeom xmlns:a="http://schemas.openxmlformats.org/drawingml/2006/main" prst="rect">
+            <a:avLst/>
+          </a:prstGeom>
+          <a:noFill xmlns:a="http://schemas.openxmlformats.org/drawingml/2006/main"/>
+          <a:ln xmlns:a="http://schemas.openxmlformats.org/drawingml/2006/main" w="0">
+            <a:noFill/>
+          </a:ln>
+        </p:spPr>
+        <p:txBody>
+          <a:bodyPr xmlns:a="http://schemas.openxmlformats.org/drawingml/2006/main" wrap="square" lIns="0" tIns="0" rIns="0" bIns="0" anchor="t"/>
+          <a:lstStyle xmlns:a="http://schemas.openxmlformats.org/drawingml/2006/main"/>
+          <a:p xmlns:a="http://schemas.openxmlformats.org/drawingml/2006/main">
+            <a:pPr algn="ctr"/>
+            <a:r>
+              <a:rPr lang="en-US" sz="900" b="1">
+                <a:solidFill>
+                  <a:srgbClr val="202124"/>
+                </a:solidFill>
+                <a:latin typeface="Arial"/>
+                <a:ea typeface="Arial"/>
+              </a:rPr>
+              <a:t>04</a:t>
+            </a:r>
+            <a:endParaRPr lang="en-US"/>
+          </a:p>
+        </p:txBody>
+      </p:sp>
+      <p:sp>
+        <p:nvSpPr>
+          <p:cNvPr id="34" name="visual-process-label-3"/>
+          <p:cNvSpPr txBox="1"/>
+          <p:nvPr/>
+        </p:nvSpPr>
+        <p:spPr>
+          <a:xfrm xmlns:a="http://schemas.openxmlformats.org/drawingml/2006/main">
+            <a:off x="1943100" y="5600700"/>
+            <a:ext cx="1714500" cy="228600"/>
+          </a:xfrm>
+          <a:prstGeom xmlns:a="http://schemas.openxmlformats.org/drawingml/2006/main" prst="rect">
+            <a:avLst/>
+          </a:prstGeom>
+          <a:noFill xmlns:a="http://schemas.openxmlformats.org/drawingml/2006/main"/>
+          <a:ln xmlns:a="http://schemas.openxmlformats.org/drawingml/2006/main" w="0">
+            <a:noFill/>
+          </a:ln>
+        </p:spPr>
+        <p:txBody>
+          <a:bodyPr xmlns:a="http://schemas.openxmlformats.org/drawingml/2006/main" wrap="square" lIns="0" tIns="0" rIns="0" bIns="0" anchor="t"/>
+          <a:lstStyle xmlns:a="http://schemas.openxmlformats.org/drawingml/2006/main"/>
+          <a:p xmlns:a="http://schemas.openxmlformats.org/drawingml/2006/main">
+            <a:r>
+              <a:rPr lang="en-US" sz="1650" b="1">
+                <a:solidFill>
+                  <a:srgbClr val="EEF4EE"/>
+                </a:solidFill>
+                <a:latin typeface="Arial"/>
+                <a:ea typeface="Arial"/>
+              </a:rPr>
+              <a:t>Act</a:t>
+            </a:r>
+            <a:endParaRPr lang="en-US"/>
+          </a:p>
+        </p:txBody>
+      </p:sp>
+      <p:sp>
+        <p:nvSpPr>
+          <p:cNvPr id="35" name="visual-process-text-3"/>
+          <p:cNvSpPr txBox="1"/>
+          <p:nvPr/>
+        </p:nvSpPr>
+        <p:spPr>
+          <a:xfrm xmlns:a="http://schemas.openxmlformats.org/drawingml/2006/main">
+            <a:off x="3829050" y="5629275"/>
+            <a:ext cx="2476500" cy="228600"/>
+          </a:xfrm>
+          <a:prstGeom xmlns:a="http://schemas.openxmlformats.org/drawingml/2006/main" prst="rect">
+            <a:avLst/>
+          </a:prstGeom>
+          <a:noFill xmlns:a="http://schemas.openxmlformats.org/drawingml/2006/main"/>
+          <a:ln xmlns:a="http://schemas.openxmlformats.org/drawingml/2006/main" w="0">
+            <a:noFill/>
+          </a:ln>
+        </p:spPr>
+        <p:txBody>
+          <a:bodyPr xmlns:a="http://schemas.openxmlformats.org/drawingml/2006/main" wrap="square" lIns="0" tIns="0" rIns="0" bIns="0" anchor="t"/>
+          <a:lstStyle xmlns:a="http://schemas.openxmlformats.org/drawingml/2006/main"/>
+          <a:p xmlns:a="http://schemas.openxmlformats.org/drawingml/2006/main">
+            <a:r>
+              <a:rPr lang="en-US" sz="1275">
+                <a:solidFill>
+                  <a:srgbClr val="838884"/>
+                </a:solidFill>
+                <a:latin typeface="Arial"/>
+                <a:ea typeface="Arial"/>
+              </a:rPr>
+              <a:t>Return with proof</a:t>
+            </a:r>
+            <a:endParaRPr lang="en-US"/>
+          </a:p>
+        </p:txBody>
+      </p:sp>
+      <p:sp>
+        <p:nvSpPr>
+          <p:cNvPr id="36" name="visual-process-rule"/>
+          <p:cNvSpPr/>
+          <p:nvPr/>
+        </p:nvSpPr>
+        <p:spPr>
+          <a:xfrm xmlns:a="http://schemas.openxmlformats.org/drawingml/2006/main">
+            <a:off x="7239000" y="3486150"/>
+            <a:ext cx="0" cy="2705100"/>
+          </a:xfrm>
+          <a:prstGeom xmlns:a="http://schemas.openxmlformats.org/drawingml/2006/main" prst="line">
+            <a:avLst/>
+          </a:prstGeom>
+          <a:noFill xmlns:a="http://schemas.openxmlformats.org/drawingml/2006/main"/>
+          <a:ln xmlns:a="http://schemas.openxmlformats.org/drawingml/2006/main" w="12700">
+            <a:solidFill>
+              <a:srgbClr val="838884"/>
+            </a:solidFill>
+            <a:prstDash val="solid"/>
+          </a:ln>
+        </p:spPr>
+        <p:txBody>
+          <a:bodyPr xmlns:a="http://schemas.openxmlformats.org/drawingml/2006/main" wrap="square" lIns="0" tIns="0" rIns="0" bIns="0" anchor="t"/>
+          <a:lstStyle xmlns:a="http://schemas.openxmlformats.org/drawingml/2006/main"/>
+          <a:p xmlns:a="http://schemas.openxmlformats.org/drawingml/2006/main">
+            <a:r>
+              <a:rPr lang="en-US"/>
+              <a:t/>
+            </a:r>
+            <a:endParaRPr lang="en-US"/>
+          </a:p>
+        </p:txBody>
+      </p:sp>
+      <p:sp>
+        <p:nvSpPr>
+          <p:cNvPr id="37" name="visual-process-note-label"/>
+          <p:cNvSpPr txBox="1"/>
+          <p:nvPr/>
+        </p:nvSpPr>
+        <p:spPr>
+          <a:xfrm xmlns:a="http://schemas.openxmlformats.org/drawingml/2006/main">
+            <a:off x="8001000" y="3562350"/>
+            <a:ext cx="3429000" cy="228600"/>
+          </a:xfrm>
+          <a:prstGeom xmlns:a="http://schemas.openxmlformats.org/drawingml/2006/main" prst="rect">
+            <a:avLst/>
+          </a:prstGeom>
+          <a:noFill xmlns:a="http://schemas.openxmlformats.org/drawingml/2006/main"/>
+          <a:ln xmlns:a="http://schemas.openxmlformats.org/drawingml/2006/main" w="0">
+            <a:noFill/>
+          </a:ln>
+        </p:spPr>
+        <p:txBody>
+          <a:bodyPr xmlns:a="http://schemas.openxmlformats.org/drawingml/2006/main" wrap="square" lIns="0" tIns="0" rIns="0" bIns="0" anchor="t"/>
+          <a:lstStyle xmlns:a="http://schemas.openxmlformats.org/drawingml/2006/main"/>
+          <a:p xmlns:a="http://schemas.openxmlformats.org/drawingml/2006/main">
+            <a:r>
+              <a:rPr lang="en-US" sz="1125" b="1">
+                <a:solidFill>
+                  <a:srgbClr val="58B88B"/>
+                </a:solidFill>
+                <a:latin typeface="Arial"/>
+                <a:ea typeface="Arial"/>
+              </a:rPr>
+              <a:t>PROCESS CARRIER</a:t>
+            </a:r>
+            <a:endParaRPr lang="en-US"/>
+          </a:p>
+        </p:txBody>
+      </p:sp>
+      <p:sp>
+        <p:nvSpPr>
+          <p:cNvPr id="38" name="visual-process-note-title"/>
+          <p:cNvSpPr txBox="1"/>
+          <p:nvPr/>
+        </p:nvSpPr>
+        <p:spPr>
+          <a:xfrm xmlns:a="http://schemas.openxmlformats.org/drawingml/2006/main">
+            <a:off x="8001000" y="4038600"/>
+            <a:ext cx="4381500" cy="685800"/>
+          </a:xfrm>
+          <a:prstGeom xmlns:a="http://schemas.openxmlformats.org/drawingml/2006/main" prst="rect">
+            <a:avLst/>
+          </a:prstGeom>
+          <a:noFill xmlns:a="http://schemas.openxmlformats.org/drawingml/2006/main"/>
+          <a:ln xmlns:a="http://schemas.openxmlformats.org/drawingml/2006/main" w="0">
+            <a:noFill/>
+          </a:ln>
+        </p:spPr>
+        <p:txBody>
+          <a:bodyPr xmlns:a="http://schemas.openxmlformats.org/drawingml/2006/main" wrap="square" lIns="0" tIns="0" rIns="0" bIns="0" anchor="t"/>
+          <a:lstStyle xmlns:a="http://schemas.openxmlformats.org/drawingml/2006/main"/>
+          <a:p xmlns:a="http://schemas.openxmlformats.org/drawingml/2006/main">
+            <a:r>
+              <a:rPr lang="en-US" sz="2250" b="1">
+                <a:solidFill>
+                  <a:srgbClr val="EEF4EE"/>
+                </a:solidFill>
+                <a:latin typeface="Arial"/>
+                <a:ea typeface="Arial"/>
+              </a:rPr>
+              <a:t>A relationship earns a line.</a:t>
+            </a:r>
+            <a:endParaRPr lang="en-US"/>
+          </a:p>
+        </p:txBody>
+      </p:sp>
+      <p:sp>
+        <p:nvSpPr>
+          <p:cNvPr id="39" name="visual-process-note-body"/>
+          <p:cNvSpPr txBox="1"/>
+          <p:nvPr/>
+        </p:nvSpPr>
+        <p:spPr>
+          <a:xfrm xmlns:a="http://schemas.openxmlformats.org/drawingml/2006/main">
+            <a:off x="8001000" y="5048250"/>
+            <a:ext cx="4572000" cy="685800"/>
+          </a:xfrm>
+          <a:prstGeom xmlns:a="http://schemas.openxmlformats.org/drawingml/2006/main" prst="rect">
+            <a:avLst/>
+          </a:prstGeom>
+          <a:noFill xmlns:a="http://schemas.openxmlformats.org/drawingml/2006/main"/>
+          <a:ln xmlns:a="http://schemas.openxmlformats.org/drawingml/2006/main" w="0">
+            <a:noFill/>
+          </a:ln>
+        </p:spPr>
+        <p:txBody>
+          <a:bodyPr xmlns:a="http://schemas.openxmlformats.org/drawingml/2006/main" wrap="square" lIns="0" tIns="0" rIns="0" bIns="0" anchor="t"/>
+          <a:lstStyle xmlns:a="http://schemas.openxmlformats.org/drawingml/2006/main"/>
+          <a:p xmlns:a="http://schemas.openxmlformats.org/drawingml/2006/main">
+            <a:r>
+              <a:rPr lang="en-US" sz="1275">
+                <a:solidFill>
+                  <a:srgbClr val="838884"/>
+                </a:solidFill>
+                <a:latin typeface="Arial"/>
+                <a:ea typeface="Arial"/>
+              </a:rPr>
+              <a:t>Use sequence, direction and conditions to make the mechanism visible. If the relationship is not real, remove the arrow.</a:t>
+            </a:r>
+            <a:endParaRPr lang="en-US"/>
+          </a:p>
+        </p:txBody>
+      </p:sp>
+      <p:sp>
+        <p:nvSpPr>
+          <p:cNvPr id="40" name="visual-note"/>
           <p:cNvSpPr/>
           <p:nvPr/>
         </p:nvSpPr>
@@ -6152,7 +7096,7 @@
       </p:sp>
       <p:sp>
         <p:nvSpPr>
-          <p:cNvPr id="22" name="visual-note-label"/>
+          <p:cNvPr id="41" name="visual-note-label"/>
           <p:cNvSpPr txBox="1"/>
           <p:nvPr/>
         </p:nvSpPr>
@@ -6189,7 +7133,7 @@
       </p:sp>
       <p:sp>
         <p:nvSpPr>
-          <p:cNvPr id="23" name="visual-note-text"/>
+          <p:cNvPr id="42" name="visual-note-text"/>
           <p:cNvSpPr txBox="1"/>
           <p:nvPr/>
         </p:nvSpPr>
@@ -6226,7 +7170,7 @@
       </p:sp>
       <p:sp>
         <p:nvSpPr>
-          <p:cNvPr id="24" name="visual-note-foot"/>
+          <p:cNvPr id="43" name="visual-note-foot"/>
           <p:cNvSpPr txBox="1"/>
           <p:nvPr/>
         </p:nvSpPr>
@@ -6263,7 +7207,7 @@
       </p:sp>
       <p:sp>
         <p:nvSpPr>
-          <p:cNvPr id="25" name="source"/>
+          <p:cNvPr id="44" name="source"/>
           <p:cNvSpPr txBox="1"/>
           <p:nvPr/>
         </p:nvSpPr>
@@ -6300,7 +7244,7 @@
       </p:sp>
       <p:sp>
         <p:nvSpPr>
-          <p:cNvPr id="26" name="page-number"/>
+          <p:cNvPr id="45" name="page-number"/>
           <p:cNvSpPr txBox="1"/>
           <p:nvPr/>
         </p:nvSpPr>
